--- a/Enterprise_design_refinement.pptx
+++ b/Enterprise_design_refinement.pptx
@@ -15,9 +15,10 @@
     <p:sldId id="263" r:id="rId9"/>
     <p:sldId id="264" r:id="rId10"/>
     <p:sldId id="265" r:id="rId11"/>
+    <p:sldId id="266" r:id="rId12"/>
   </p:sldIdLst>
   <p:notesMasterIdLst>
-    <p:notesMasterId r:id="rId12"/>
+    <p:notesMasterId r:id="rId13"/>
   </p:notesMasterIdLst>
   <p:sldSz cx="18288000" cy="10287000"/>
   <p:notesSz cx="10287000" cy="18288000"/>
@@ -599,7 +600,7 @@
           <a:p>
             <a:r>
               <a:rPr lang="en-US" dirty="0"/>
-              <a:t>Transition to discussion. We expect a few questions — how we handle NPI data, how we manage cost, and when Windows users get access — so here's the short version of each, then open the floor for anything else.</a:t>
+              <a:t>This maps the AI tools everyone has access to on two axes. Horizontal is depth of use — everyday, for-everyone tools on the left, specialist and deep tools on the right. Vertical is power — assistive help at the bottom, autonomous agents at the top. Google Workspace tools cluster in everyday assist and automation; Claude tools sit in the higher-power, more specialist agentic space. The axes are one useful cut — we can reframe them (learning curve, autonomy, data sensitivity) if that's more useful for the audience.</a:t>
             </a:r>
             <a:endParaRPr lang="en-US" dirty="0"/>
           </a:p>
@@ -623,6 +624,94 @@
             <a:fld id="{F7021451-1387-4CA6-816F-3879F97B5CBC}" type="slidenum">
               <a:rPr lang="en-US"/>
               <a:t>10</a:t>
+            </a:fld>
+            <a:endParaRPr lang="en-US"/>
+          </a:p>
+        </p:txBody>
+      </p:sp>
+    </p:spTree>
+    <p:extLst>
+      <p:ext uri="{BB962C8B-B14F-4D97-AF65-F5344CB8AC3E}">
+        <p14:creationId xmlns:p14="http://schemas.microsoft.com/office/powerpoint/2010/main" val="1024086991"/>
+      </p:ext>
+    </p:extLst>
+  </p:cSld>
+  <p:clrMapOvr>
+    <a:masterClrMapping/>
+  </p:clrMapOvr>
+</p:notes>
+</file>
+
+<file path=ppt/notesSlides/notesSlide11.xml><?xml version="1.0" encoding="utf-8"?>
+<p:notes xmlns:a="http://schemas.openxmlformats.org/drawingml/2006/main" xmlns:r="http://schemas.openxmlformats.org/officeDocument/2006/relationships" xmlns:p="http://schemas.openxmlformats.org/presentationml/2006/main">
+  <p:cSld>
+    <p:spTree>
+      <p:nvGrpSpPr>
+        <p:cNvPr id="1" name=""/>
+        <p:cNvGrpSpPr/>
+        <p:nvPr/>
+      </p:nvGrpSpPr>
+      <p:grpSpPr>
+        <a:xfrm>
+          <a:off x="0" y="0"/>
+          <a:ext cx="0" cy="0"/>
+          <a:chOff x="0" y="0"/>
+          <a:chExt cx="0" cy="0"/>
+        </a:xfrm>
+      </p:grpSpPr>
+      <p:sp>
+        <p:nvSpPr>
+          <p:cNvPr id="2" name="Slide Image Placeholder 1"/>
+          <p:cNvSpPr>
+            <a:spLocks noGrp="1" noRot="1" noChangeAspect="1"/>
+          </p:cNvSpPr>
+          <p:nvPr>
+            <p:ph type="sldImg"/>
+          </p:nvPr>
+        </p:nvSpPr>
+        <p:spPr/>
+      </p:sp>
+      <p:sp>
+        <p:nvSpPr>
+          <p:cNvPr id="3" name="Notes Placeholder 2"/>
+          <p:cNvSpPr>
+            <a:spLocks noGrp="1"/>
+          </p:cNvSpPr>
+          <p:nvPr>
+            <p:ph type="body" idx="1"/>
+          </p:nvPr>
+        </p:nvSpPr>
+        <p:spPr/>
+        <p:txBody>
+          <a:bodyPr/>
+          <a:lstStyle/>
+          <a:p>
+            <a:r>
+              <a:rPr lang="en-US" dirty="0"/>
+              <a:t>Transition to discussion. We expect a few questions — how we handle NPI data, how we manage cost, and when Windows users get access — so here's the short version of each, then open the floor for anything else.</a:t>
+            </a:r>
+            <a:endParaRPr lang="en-US" dirty="0"/>
+          </a:p>
+        </p:txBody>
+      </p:sp>
+      <p:sp>
+        <p:nvSpPr>
+          <p:cNvPr id="4" name="Slide Number Placeholder 3"/>
+          <p:cNvSpPr>
+            <a:spLocks noGrp="1"/>
+          </p:cNvSpPr>
+          <p:nvPr>
+            <p:ph type="sldNum" sz="quarter" idx="10"/>
+          </p:nvPr>
+        </p:nvSpPr>
+        <p:spPr/>
+        <p:txBody>
+          <a:bodyPr/>
+          <a:lstStyle/>
+          <a:p>
+            <a:fld id="{F7021451-1387-4CA6-816F-3879F97B5CBC}" type="slidenum">
+              <a:rPr lang="en-US"/>
+              <a:t>11</a:t>
             </a:fld>
             <a:endParaRPr lang="en-US"/>
           </a:p>
@@ -2134,7 +2223,1448 @@
                 <a:ea typeface="Libre Franklin" pitchFamily="34" charset="-122"/>
                 <a:cs typeface="Libre Franklin" pitchFamily="34" charset="-120"/>
               </a:rPr>
-              <a:t>Q&amp;A · DISCUSSION · 10</a:t>
+              <a:t>THE TOOLKIT · 10</a:t>
+            </a:r>
+            <a:endParaRPr lang="en-US" sz="1200" dirty="0"/>
+          </a:p>
+        </p:txBody>
+      </p:sp>
+      <p:sp>
+        <p:nvSpPr>
+          <p:cNvPr id="3" name="Text 1"/>
+          <p:cNvSpPr/>
+          <p:nvPr/>
+        </p:nvSpPr>
+        <p:spPr>
+          <a:xfrm>
+            <a:off x="952500" y="800100"/>
+            <a:ext cx="18021300" cy="538163"/>
+          </a:xfrm>
+          <a:prstGeom prst="rect">
+            <a:avLst/>
+          </a:prstGeom>
+          <a:noFill/>
+          <a:ln/>
+        </p:spPr>
+        <p:txBody>
+          <a:bodyPr wrap="square" lIns="25400" tIns="25400" rIns="25400" bIns="25400" rtlCol="0" anchor="t">
+            <a:normAutofit/>
+          </a:bodyPr>
+          <a:lstStyle/>
+          <a:p>
+            <a:pPr algn="l" indent="0" marL="0">
+              <a:lnSpc>
+                <a:spcPct val="104000"/>
+              </a:lnSpc>
+              <a:buNone/>
+            </a:pPr>
+            <a:r>
+              <a:rPr lang="en-US" sz="3750" b="1" spc="-56" kern="0" dirty="0">
+                <a:solidFill>
+                  <a:srgbClr val="16242F"/>
+                </a:solidFill>
+                <a:latin typeface="Libre Franklin" pitchFamily="34" charset="0"/>
+                <a:ea typeface="Libre Franklin" pitchFamily="34" charset="-122"/>
+                <a:cs typeface="Libre Franklin" pitchFamily="34" charset="-120"/>
+              </a:rPr>
+              <a:t>Your AI toolkit, </a:t>
+            </a:r>
+            <a:pPr algn="l" indent="0" marL="0">
+              <a:lnSpc>
+                <a:spcPct val="104000"/>
+              </a:lnSpc>
+              <a:buNone/>
+            </a:pPr>
+            <a:r>
+              <a:rPr lang="en-US" sz="3750" i="1" spc="-56" kern="0" dirty="0">
+                <a:solidFill>
+                  <a:srgbClr val="1E73B8"/>
+                </a:solidFill>
+                <a:latin typeface="Source Serif 4" pitchFamily="34" charset="0"/>
+                <a:ea typeface="Source Serif 4" pitchFamily="34" charset="-122"/>
+                <a:cs typeface="Source Serif 4" pitchFamily="34" charset="-120"/>
+              </a:rPr>
+              <a:t>mapped</a:t>
+            </a:r>
+            <a:pPr algn="l" indent="0" marL="0">
+              <a:lnSpc>
+                <a:spcPct val="104000"/>
+              </a:lnSpc>
+              <a:buNone/>
+            </a:pPr>
+            <a:r>
+              <a:rPr lang="en-US" sz="3750" b="1" spc="-56" kern="0" dirty="0">
+                <a:solidFill>
+                  <a:srgbClr val="16242F"/>
+                </a:solidFill>
+                <a:latin typeface="Libre Franklin" pitchFamily="34" charset="0"/>
+                <a:ea typeface="Libre Franklin" pitchFamily="34" charset="-122"/>
+                <a:cs typeface="Libre Franklin" pitchFamily="34" charset="-120"/>
+              </a:rPr>
+              <a:t>.</a:t>
+            </a:r>
+            <a:endParaRPr lang="en-US" sz="3750" dirty="0"/>
+          </a:p>
+        </p:txBody>
+      </p:sp>
+      <p:sp>
+        <p:nvSpPr>
+          <p:cNvPr id="4" name="Text 2"/>
+          <p:cNvSpPr/>
+          <p:nvPr/>
+        </p:nvSpPr>
+        <p:spPr>
+          <a:xfrm>
+            <a:off x="952500" y="1414463"/>
+            <a:ext cx="12573000" cy="384795"/>
+          </a:xfrm>
+          <a:prstGeom prst="rect">
+            <a:avLst/>
+          </a:prstGeom>
+          <a:noFill/>
+          <a:ln/>
+        </p:spPr>
+        <p:txBody>
+          <a:bodyPr wrap="square" lIns="25400" tIns="25400" rIns="25400" bIns="25400" rtlCol="0" anchor="t">
+            <a:normAutofit/>
+          </a:bodyPr>
+          <a:lstStyle/>
+          <a:p>
+            <a:pPr algn="l" indent="0" marL="0">
+              <a:lnSpc>
+                <a:spcPct val="140000"/>
+              </a:lnSpc>
+              <a:buNone/>
+            </a:pPr>
+            <a:r>
+              <a:rPr lang="en-US" sz="1950" dirty="0">
+                <a:solidFill>
+                  <a:srgbClr val="566573"/>
+                </a:solidFill>
+                <a:latin typeface="Libre Franklin" pitchFamily="34" charset="0"/>
+                <a:ea typeface="Libre Franklin" pitchFamily="34" charset="-122"/>
+                <a:cs typeface="Libre Franklin" pitchFamily="34" charset="-120"/>
+              </a:rPr>
+              <a:t>Every tool you have access to — placed by how deep the work goes and how much it does for you.</a:t>
+            </a:r>
+            <a:endParaRPr lang="en-US" sz="1950" dirty="0"/>
+          </a:p>
+        </p:txBody>
+      </p:sp>
+      <p:sp>
+        <p:nvSpPr>
+          <p:cNvPr id="5" name="Text 3"/>
+          <p:cNvSpPr/>
+          <p:nvPr/>
+        </p:nvSpPr>
+        <p:spPr>
+          <a:xfrm rot="-5400000">
+            <a:off x="-295275" y="5633517"/>
+            <a:ext cx="2864739" cy="171450"/>
+          </a:xfrm>
+          <a:prstGeom prst="rect">
+            <a:avLst/>
+          </a:prstGeom>
+          <a:noFill/>
+          <a:ln/>
+        </p:spPr>
+        <p:txBody>
+          <a:bodyPr wrap="none" lIns="25400" tIns="25400" rIns="25400" bIns="25400" rtlCol="0" anchor="t">
+            <a:normAutofit/>
+          </a:bodyPr>
+          <a:lstStyle/>
+          <a:p>
+            <a:pPr algn="l" indent="0" marL="0">
+              <a:lnSpc>
+                <a:spcPct val="100000"/>
+              </a:lnSpc>
+              <a:buNone/>
+            </a:pPr>
+            <a:r>
+              <a:rPr lang="en-US" sz="1050" b="1" spc="168" kern="0" dirty="0">
+                <a:solidFill>
+                  <a:srgbClr val="94A2AE"/>
+                </a:solidFill>
+                <a:latin typeface="Libre Franklin" pitchFamily="34" charset="0"/>
+                <a:ea typeface="Libre Franklin" pitchFamily="34" charset="-122"/>
+                <a:cs typeface="Libre Franklin" pitchFamily="34" charset="-120"/>
+              </a:rPr>
+              <a:t>POWER · ASSISTIVE → AGENTIC</a:t>
+            </a:r>
+            <a:endParaRPr lang="en-US" sz="1050" dirty="0"/>
+          </a:p>
+        </p:txBody>
+      </p:sp>
+      <p:sp>
+        <p:nvSpPr>
+          <p:cNvPr id="6" name="Shape 4"/>
+          <p:cNvSpPr/>
+          <p:nvPr/>
+        </p:nvSpPr>
+        <p:spPr>
+          <a:xfrm>
+            <a:off x="1371600" y="1970708"/>
+            <a:ext cx="15963900" cy="7220917"/>
+          </a:xfrm>
+          <a:prstGeom prst="roundRect">
+            <a:avLst>
+              <a:gd name="adj" fmla="val 1319"/>
+            </a:avLst>
+          </a:prstGeom>
+          <a:solidFill>
+            <a:srgbClr val="FFFFFF"/>
+          </a:solidFill>
+          <a:ln w="9525">
+            <a:solidFill>
+              <a:srgbClr val="E5EBF1"/>
+            </a:solidFill>
+            <a:prstDash val="solid"/>
+          </a:ln>
+          <a:effectLst>
+            <a:outerShdw sx="100000" sy="100000" kx="0" ky="0" algn="bl" rotWithShape="0" blurRad="28575" dist="9525" dir="5400000">
+              <a:srgbClr val="102840">
+                <a:alpha val="5000"/>
+              </a:srgbClr>
+            </a:outerShdw>
+          </a:effectLst>
+        </p:spPr>
+      </p:sp>
+      <p:sp>
+        <p:nvSpPr>
+          <p:cNvPr id="7" name="Shape 5"/>
+          <p:cNvSpPr/>
+          <p:nvPr/>
+        </p:nvSpPr>
+        <p:spPr>
+          <a:xfrm>
+            <a:off x="9353550" y="1980233"/>
+            <a:ext cx="9525" cy="7201867"/>
+          </a:xfrm>
+          <a:prstGeom prst="rect">
+            <a:avLst/>
+          </a:prstGeom>
+          <a:solidFill>
+            <a:srgbClr val="E5EBF1"/>
+          </a:solidFill>
+          <a:ln/>
+        </p:spPr>
+      </p:sp>
+      <p:sp>
+        <p:nvSpPr>
+          <p:cNvPr id="8" name="Shape 6"/>
+          <p:cNvSpPr/>
+          <p:nvPr/>
+        </p:nvSpPr>
+        <p:spPr>
+          <a:xfrm>
+            <a:off x="1381125" y="5581129"/>
+            <a:ext cx="15944850" cy="9525"/>
+          </a:xfrm>
+          <a:prstGeom prst="rect">
+            <a:avLst/>
+          </a:prstGeom>
+          <a:solidFill>
+            <a:srgbClr val="E5EBF1"/>
+          </a:solidFill>
+          <a:ln/>
+        </p:spPr>
+      </p:sp>
+      <p:sp>
+        <p:nvSpPr>
+          <p:cNvPr id="9" name="Shape 7"/>
+          <p:cNvSpPr/>
+          <p:nvPr/>
+        </p:nvSpPr>
+        <p:spPr>
+          <a:xfrm>
+            <a:off x="9353550" y="1980233"/>
+            <a:ext cx="7972425" cy="3600896"/>
+          </a:xfrm>
+          <a:prstGeom prst="rect">
+            <a:avLst/>
+          </a:prstGeom>
+          <a:gradFill rotWithShape="1">
+            <a:gsLst>
+              <a:gs pos="0">
+                <a:srgbClr val="1E73B8">
+                  <a:alpha val="5000"/>
+                </a:srgbClr>
+              </a:gs>
+              <a:gs pos="62000">
+                <a:srgbClr val="1E73B8">
+                  <a:alpha val="0"/>
+                </a:srgbClr>
+              </a:gs>
+            </a:gsLst>
+            <a:lin ang="7500000" scaled="0"/>
+          </a:gradFill>
+          <a:ln/>
+        </p:spPr>
+      </p:sp>
+      <p:sp>
+        <p:nvSpPr>
+          <p:cNvPr id="10" name="Text 8"/>
+          <p:cNvSpPr/>
+          <p:nvPr/>
+        </p:nvSpPr>
+        <p:spPr>
+          <a:xfrm>
+            <a:off x="1609725" y="2151683"/>
+            <a:ext cx="2064149" cy="199058"/>
+          </a:xfrm>
+          <a:prstGeom prst="rect">
+            <a:avLst/>
+          </a:prstGeom>
+          <a:noFill/>
+          <a:ln/>
+        </p:spPr>
+        <p:txBody>
+          <a:bodyPr wrap="square" lIns="25400" tIns="25400" rIns="25400" bIns="25400" rtlCol="0" anchor="t">
+            <a:normAutofit/>
+          </a:bodyPr>
+          <a:lstStyle/>
+          <a:p>
+            <a:pPr algn="l" indent="0" marL="0">
+              <a:lnSpc>
+                <a:spcPct val="130000"/>
+              </a:lnSpc>
+              <a:buNone/>
+            </a:pPr>
+            <a:r>
+              <a:rPr lang="en-US" sz="975" b="1" spc="117" kern="0" dirty="0">
+                <a:solidFill>
+                  <a:srgbClr val="94A2AE"/>
+                </a:solidFill>
+                <a:latin typeface="Libre Franklin" pitchFamily="34" charset="0"/>
+                <a:ea typeface="Libre Franklin" pitchFamily="34" charset="-122"/>
+                <a:cs typeface="Libre Franklin" pitchFamily="34" charset="-120"/>
+              </a:rPr>
+              <a:t>AUTOMATE THE ROUTINE</a:t>
+            </a:r>
+            <a:endParaRPr lang="en-US" sz="975" dirty="0"/>
+          </a:p>
+        </p:txBody>
+      </p:sp>
+      <p:sp>
+        <p:nvSpPr>
+          <p:cNvPr id="11" name="Text 9"/>
+          <p:cNvSpPr/>
+          <p:nvPr/>
+        </p:nvSpPr>
+        <p:spPr>
+          <a:xfrm>
+            <a:off x="14803621" y="2151683"/>
+            <a:ext cx="2293754" cy="199058"/>
+          </a:xfrm>
+          <a:prstGeom prst="rect">
+            <a:avLst/>
+          </a:prstGeom>
+          <a:noFill/>
+          <a:ln/>
+        </p:spPr>
+        <p:txBody>
+          <a:bodyPr wrap="square" lIns="25400" tIns="25400" rIns="25400" bIns="25400" rtlCol="0" anchor="t">
+            <a:normAutofit/>
+          </a:bodyPr>
+          <a:lstStyle/>
+          <a:p>
+            <a:pPr algn="r" indent="0" marL="0">
+              <a:lnSpc>
+                <a:spcPct val="130000"/>
+              </a:lnSpc>
+              <a:buNone/>
+            </a:pPr>
+            <a:r>
+              <a:rPr lang="en-US" sz="975" b="1" spc="117" kern="0" dirty="0">
+                <a:solidFill>
+                  <a:srgbClr val="1E73B8"/>
+                </a:solidFill>
+                <a:latin typeface="Libre Franklin" pitchFamily="34" charset="0"/>
+                <a:ea typeface="Libre Franklin" pitchFamily="34" charset="-122"/>
+                <a:cs typeface="Libre Franklin" pitchFamily="34" charset="-120"/>
+              </a:rPr>
+              <a:t>AUTONOMOUS · SPECIALIST</a:t>
+            </a:r>
+            <a:endParaRPr lang="en-US" sz="975" dirty="0"/>
+          </a:p>
+        </p:txBody>
+      </p:sp>
+      <p:sp>
+        <p:nvSpPr>
+          <p:cNvPr id="12" name="Text 10"/>
+          <p:cNvSpPr/>
+          <p:nvPr/>
+        </p:nvSpPr>
+        <p:spPr>
+          <a:xfrm>
+            <a:off x="1609725" y="8849692"/>
+            <a:ext cx="1517846" cy="199058"/>
+          </a:xfrm>
+          <a:prstGeom prst="rect">
+            <a:avLst/>
+          </a:prstGeom>
+          <a:noFill/>
+          <a:ln/>
+        </p:spPr>
+        <p:txBody>
+          <a:bodyPr wrap="square" lIns="25400" tIns="25400" rIns="25400" bIns="25400" rtlCol="0" anchor="t">
+            <a:normAutofit/>
+          </a:bodyPr>
+          <a:lstStyle/>
+          <a:p>
+            <a:pPr algn="l" indent="0" marL="0">
+              <a:lnSpc>
+                <a:spcPct val="130000"/>
+              </a:lnSpc>
+              <a:buNone/>
+            </a:pPr>
+            <a:r>
+              <a:rPr lang="en-US" sz="975" b="1" spc="117" kern="0" dirty="0">
+                <a:solidFill>
+                  <a:srgbClr val="94A2AE"/>
+                </a:solidFill>
+                <a:latin typeface="Libre Franklin" pitchFamily="34" charset="0"/>
+                <a:ea typeface="Libre Franklin" pitchFamily="34" charset="-122"/>
+                <a:cs typeface="Libre Franklin" pitchFamily="34" charset="-120"/>
+              </a:rPr>
+              <a:t>EVERYDAY ASSIST</a:t>
+            </a:r>
+            <a:endParaRPr lang="en-US" sz="975" dirty="0"/>
+          </a:p>
+        </p:txBody>
+      </p:sp>
+      <p:sp>
+        <p:nvSpPr>
+          <p:cNvPr id="13" name="Text 11"/>
+          <p:cNvSpPr/>
+          <p:nvPr/>
+        </p:nvSpPr>
+        <p:spPr>
+          <a:xfrm>
+            <a:off x="15474590" y="8849692"/>
+            <a:ext cx="1622785" cy="199058"/>
+          </a:xfrm>
+          <a:prstGeom prst="rect">
+            <a:avLst/>
+          </a:prstGeom>
+          <a:noFill/>
+          <a:ln/>
+        </p:spPr>
+        <p:txBody>
+          <a:bodyPr wrap="square" lIns="25400" tIns="25400" rIns="25400" bIns="25400" rtlCol="0" anchor="t">
+            <a:normAutofit/>
+          </a:bodyPr>
+          <a:lstStyle/>
+          <a:p>
+            <a:pPr algn="r" indent="0" marL="0">
+              <a:lnSpc>
+                <a:spcPct val="130000"/>
+              </a:lnSpc>
+              <a:buNone/>
+            </a:pPr>
+            <a:r>
+              <a:rPr lang="en-US" sz="975" b="1" spc="117" kern="0" dirty="0">
+                <a:solidFill>
+                  <a:srgbClr val="94A2AE"/>
+                </a:solidFill>
+                <a:latin typeface="Libre Franklin" pitchFamily="34" charset="0"/>
+                <a:ea typeface="Libre Franklin" pitchFamily="34" charset="-122"/>
+                <a:cs typeface="Libre Franklin" pitchFamily="34" charset="-120"/>
+              </a:rPr>
+              <a:t>SPECIALIST ASSIST</a:t>
+            </a:r>
+            <a:endParaRPr lang="en-US" sz="975" dirty="0"/>
+          </a:p>
+        </p:txBody>
+      </p:sp>
+      <p:sp>
+        <p:nvSpPr>
+          <p:cNvPr id="14" name="Shape 12"/>
+          <p:cNvSpPr/>
+          <p:nvPr/>
+        </p:nvSpPr>
+        <p:spPr>
+          <a:xfrm>
+            <a:off x="2969977" y="7498184"/>
+            <a:ext cx="2243510" cy="342900"/>
+          </a:xfrm>
+          <a:prstGeom prst="roundRect">
+            <a:avLst>
+              <a:gd name="adj" fmla="val 50000"/>
+            </a:avLst>
+          </a:prstGeom>
+          <a:solidFill>
+            <a:srgbClr val="FFFFFF"/>
+          </a:solidFill>
+          <a:ln w="9525">
+            <a:solidFill>
+              <a:srgbClr val="CADFF1"/>
+            </a:solidFill>
+            <a:prstDash val="solid"/>
+          </a:ln>
+          <a:effectLst>
+            <a:outerShdw sx="100000" sy="100000" kx="0" ky="0" algn="bl" rotWithShape="0" blurRad="66675" dist="19050" dir="5400000">
+              <a:srgbClr val="102840">
+                <a:alpha val="9000"/>
+              </a:srgbClr>
+            </a:outerShdw>
+          </a:effectLst>
+        </p:spPr>
+      </p:sp>
+      <p:sp>
+        <p:nvSpPr>
+          <p:cNvPr id="15" name="Shape 13"/>
+          <p:cNvSpPr/>
+          <p:nvPr/>
+        </p:nvSpPr>
+        <p:spPr>
+          <a:xfrm>
+            <a:off x="3084277" y="7626772"/>
+            <a:ext cx="85725" cy="85725"/>
+          </a:xfrm>
+          <a:prstGeom prst="ellipse">
+            <a:avLst/>
+          </a:prstGeom>
+          <a:solidFill>
+            <a:srgbClr val="3D93D6"/>
+          </a:solidFill>
+          <a:ln/>
+        </p:spPr>
+      </p:sp>
+      <p:sp>
+        <p:nvSpPr>
+          <p:cNvPr id="16" name="Text 14"/>
+          <p:cNvSpPr/>
+          <p:nvPr/>
+        </p:nvSpPr>
+        <p:spPr>
+          <a:xfrm>
+            <a:off x="3255727" y="7583909"/>
+            <a:ext cx="1985896" cy="209550"/>
+          </a:xfrm>
+          <a:prstGeom prst="rect">
+            <a:avLst/>
+          </a:prstGeom>
+          <a:noFill/>
+          <a:ln/>
+        </p:spPr>
+        <p:txBody>
+          <a:bodyPr wrap="none" lIns="25400" tIns="25400" rIns="25400" bIns="25400" rtlCol="0" anchor="t">
+            <a:normAutofit/>
+          </a:bodyPr>
+          <a:lstStyle/>
+          <a:p>
+            <a:pPr algn="l" indent="0" marL="0">
+              <a:lnSpc>
+                <a:spcPct val="100000"/>
+              </a:lnSpc>
+              <a:buNone/>
+            </a:pPr>
+            <a:r>
+              <a:rPr lang="en-US" sz="1350" b="1" dirty="0">
+                <a:solidFill>
+                  <a:srgbClr val="16242F"/>
+                </a:solidFill>
+                <a:latin typeface="Libre Franklin" pitchFamily="34" charset="0"/>
+                <a:ea typeface="Libre Franklin" pitchFamily="34" charset="-122"/>
+                <a:cs typeface="Libre Franklin" pitchFamily="34" charset="-120"/>
+              </a:rPr>
+              <a:t>Gemini for Workspace</a:t>
+            </a:r>
+            <a:endParaRPr lang="en-US" sz="1350" dirty="0"/>
+          </a:p>
+        </p:txBody>
+      </p:sp>
+      <p:sp>
+        <p:nvSpPr>
+          <p:cNvPr id="17" name="Shape 15"/>
+          <p:cNvSpPr/>
+          <p:nvPr/>
+        </p:nvSpPr>
+        <p:spPr>
+          <a:xfrm>
+            <a:off x="6523769" y="6489948"/>
+            <a:ext cx="1513805" cy="342900"/>
+          </a:xfrm>
+          <a:prstGeom prst="roundRect">
+            <a:avLst>
+              <a:gd name="adj" fmla="val 50000"/>
+            </a:avLst>
+          </a:prstGeom>
+          <a:solidFill>
+            <a:srgbClr val="FFFFFF"/>
+          </a:solidFill>
+          <a:ln w="9525">
+            <a:solidFill>
+              <a:srgbClr val="CADFF1"/>
+            </a:solidFill>
+            <a:prstDash val="solid"/>
+          </a:ln>
+          <a:effectLst>
+            <a:outerShdw sx="100000" sy="100000" kx="0" ky="0" algn="bl" rotWithShape="0" blurRad="66675" dist="19050" dir="5400000">
+              <a:srgbClr val="102840">
+                <a:alpha val="9000"/>
+              </a:srgbClr>
+            </a:outerShdw>
+          </a:effectLst>
+        </p:spPr>
+      </p:sp>
+      <p:sp>
+        <p:nvSpPr>
+          <p:cNvPr id="18" name="Shape 16"/>
+          <p:cNvSpPr/>
+          <p:nvPr/>
+        </p:nvSpPr>
+        <p:spPr>
+          <a:xfrm>
+            <a:off x="6638069" y="6618536"/>
+            <a:ext cx="85725" cy="85725"/>
+          </a:xfrm>
+          <a:prstGeom prst="ellipse">
+            <a:avLst/>
+          </a:prstGeom>
+          <a:solidFill>
+            <a:srgbClr val="3D93D6"/>
+          </a:solidFill>
+          <a:ln/>
+        </p:spPr>
+      </p:sp>
+      <p:sp>
+        <p:nvSpPr>
+          <p:cNvPr id="19" name="Text 17"/>
+          <p:cNvSpPr/>
+          <p:nvPr/>
+        </p:nvSpPr>
+        <p:spPr>
+          <a:xfrm>
+            <a:off x="6809519" y="6575673"/>
+            <a:ext cx="1151855" cy="209550"/>
+          </a:xfrm>
+          <a:prstGeom prst="rect">
+            <a:avLst/>
+          </a:prstGeom>
+          <a:noFill/>
+          <a:ln/>
+        </p:spPr>
+        <p:txBody>
+          <a:bodyPr wrap="none" lIns="25400" tIns="25400" rIns="25400" bIns="25400" rtlCol="0" anchor="t">
+            <a:normAutofit/>
+          </a:bodyPr>
+          <a:lstStyle/>
+          <a:p>
+            <a:pPr algn="l" indent="0" marL="0">
+              <a:lnSpc>
+                <a:spcPct val="100000"/>
+              </a:lnSpc>
+              <a:buNone/>
+            </a:pPr>
+            <a:r>
+              <a:rPr lang="en-US" sz="1350" b="1" dirty="0">
+                <a:solidFill>
+                  <a:srgbClr val="16242F"/>
+                </a:solidFill>
+                <a:latin typeface="Libre Franklin" pitchFamily="34" charset="0"/>
+                <a:ea typeface="Libre Franklin" pitchFamily="34" charset="-122"/>
+                <a:cs typeface="Libre Franklin" pitchFamily="34" charset="-120"/>
+              </a:rPr>
+              <a:t>NotebookLM</a:t>
+            </a:r>
+            <a:endParaRPr lang="en-US" sz="1350" dirty="0"/>
+          </a:p>
+        </p:txBody>
+      </p:sp>
+      <p:sp>
+        <p:nvSpPr>
+          <p:cNvPr id="20" name="Shape 18"/>
+          <p:cNvSpPr/>
+          <p:nvPr/>
+        </p:nvSpPr>
+        <p:spPr>
+          <a:xfrm>
+            <a:off x="5200315" y="4113312"/>
+            <a:ext cx="1928440" cy="342900"/>
+          </a:xfrm>
+          <a:prstGeom prst="roundRect">
+            <a:avLst>
+              <a:gd name="adj" fmla="val 50000"/>
+            </a:avLst>
+          </a:prstGeom>
+          <a:solidFill>
+            <a:srgbClr val="FFFFFF"/>
+          </a:solidFill>
+          <a:ln w="9525">
+            <a:solidFill>
+              <a:srgbClr val="CADFF1"/>
+            </a:solidFill>
+            <a:prstDash val="solid"/>
+          </a:ln>
+          <a:effectLst>
+            <a:outerShdw sx="100000" sy="100000" kx="0" ky="0" algn="bl" rotWithShape="0" blurRad="66675" dist="19050" dir="5400000">
+              <a:srgbClr val="102840">
+                <a:alpha val="9000"/>
+              </a:srgbClr>
+            </a:outerShdw>
+          </a:effectLst>
+        </p:spPr>
+      </p:sp>
+      <p:sp>
+        <p:nvSpPr>
+          <p:cNvPr id="21" name="Shape 19"/>
+          <p:cNvSpPr/>
+          <p:nvPr/>
+        </p:nvSpPr>
+        <p:spPr>
+          <a:xfrm>
+            <a:off x="5314615" y="4241899"/>
+            <a:ext cx="85725" cy="85725"/>
+          </a:xfrm>
+          <a:prstGeom prst="ellipse">
+            <a:avLst/>
+          </a:prstGeom>
+          <a:solidFill>
+            <a:srgbClr val="3D93D6"/>
+          </a:solidFill>
+          <a:ln/>
+        </p:spPr>
+      </p:sp>
+      <p:sp>
+        <p:nvSpPr>
+          <p:cNvPr id="22" name="Text 20"/>
+          <p:cNvSpPr/>
+          <p:nvPr/>
+        </p:nvSpPr>
+        <p:spPr>
+          <a:xfrm>
+            <a:off x="5486065" y="4199037"/>
+            <a:ext cx="1639319" cy="209550"/>
+          </a:xfrm>
+          <a:prstGeom prst="rect">
+            <a:avLst/>
+          </a:prstGeom>
+          <a:noFill/>
+          <a:ln/>
+        </p:spPr>
+        <p:txBody>
+          <a:bodyPr wrap="none" lIns="25400" tIns="25400" rIns="25400" bIns="25400" rtlCol="0" anchor="t">
+            <a:normAutofit/>
+          </a:bodyPr>
+          <a:lstStyle/>
+          <a:p>
+            <a:pPr algn="l" indent="0" marL="0">
+              <a:lnSpc>
+                <a:spcPct val="100000"/>
+              </a:lnSpc>
+              <a:buNone/>
+            </a:pPr>
+            <a:r>
+              <a:rPr lang="en-US" sz="1350" b="1" dirty="0">
+                <a:solidFill>
+                  <a:srgbClr val="16242F"/>
+                </a:solidFill>
+                <a:latin typeface="Libre Franklin" pitchFamily="34" charset="0"/>
+                <a:ea typeface="Libre Franklin" pitchFamily="34" charset="-122"/>
+                <a:cs typeface="Libre Franklin" pitchFamily="34" charset="-120"/>
+              </a:rPr>
+              <a:t>Workspace Studio</a:t>
+            </a:r>
+            <a:endParaRPr lang="en-US" sz="1350" dirty="0"/>
+          </a:p>
+        </p:txBody>
+      </p:sp>
+      <p:sp>
+        <p:nvSpPr>
+          <p:cNvPr id="23" name="Shape 21"/>
+          <p:cNvSpPr/>
+          <p:nvPr/>
+        </p:nvSpPr>
+        <p:spPr>
+          <a:xfrm>
+            <a:off x="8719877" y="4977557"/>
+            <a:ext cx="1905074" cy="342900"/>
+          </a:xfrm>
+          <a:prstGeom prst="roundRect">
+            <a:avLst>
+              <a:gd name="adj" fmla="val 50000"/>
+            </a:avLst>
+          </a:prstGeom>
+          <a:solidFill>
+            <a:srgbClr val="FFFFFF"/>
+          </a:solidFill>
+          <a:ln w="9525">
+            <a:solidFill>
+              <a:srgbClr val="CADFF1"/>
+            </a:solidFill>
+            <a:prstDash val="solid"/>
+          </a:ln>
+          <a:effectLst>
+            <a:outerShdw sx="100000" sy="100000" kx="0" ky="0" algn="bl" rotWithShape="0" blurRad="66675" dist="19050" dir="5400000">
+              <a:srgbClr val="102840">
+                <a:alpha val="9000"/>
+              </a:srgbClr>
+            </a:outerShdw>
+          </a:effectLst>
+        </p:spPr>
+      </p:sp>
+      <p:sp>
+        <p:nvSpPr>
+          <p:cNvPr id="24" name="Shape 22"/>
+          <p:cNvSpPr/>
+          <p:nvPr/>
+        </p:nvSpPr>
+        <p:spPr>
+          <a:xfrm>
+            <a:off x="8834177" y="5106144"/>
+            <a:ext cx="85725" cy="85725"/>
+          </a:xfrm>
+          <a:prstGeom prst="ellipse">
+            <a:avLst/>
+          </a:prstGeom>
+          <a:solidFill>
+            <a:srgbClr val="3D93D6"/>
+          </a:solidFill>
+          <a:ln/>
+        </p:spPr>
+      </p:sp>
+      <p:sp>
+        <p:nvSpPr>
+          <p:cNvPr id="25" name="Text 23"/>
+          <p:cNvSpPr/>
+          <p:nvPr/>
+        </p:nvSpPr>
+        <p:spPr>
+          <a:xfrm>
+            <a:off x="9005627" y="5063282"/>
+            <a:ext cx="1613617" cy="209550"/>
+          </a:xfrm>
+          <a:prstGeom prst="rect">
+            <a:avLst/>
+          </a:prstGeom>
+          <a:noFill/>
+          <a:ln/>
+        </p:spPr>
+        <p:txBody>
+          <a:bodyPr wrap="none" lIns="25400" tIns="25400" rIns="25400" bIns="25400" rtlCol="0" anchor="t">
+            <a:normAutofit/>
+          </a:bodyPr>
+          <a:lstStyle/>
+          <a:p>
+            <a:pPr algn="l" indent="0" marL="0">
+              <a:lnSpc>
+                <a:spcPct val="100000"/>
+              </a:lnSpc>
+              <a:buNone/>
+            </a:pPr>
+            <a:r>
+              <a:rPr lang="en-US" sz="1350" b="1" dirty="0">
+                <a:solidFill>
+                  <a:srgbClr val="16242F"/>
+                </a:solidFill>
+                <a:latin typeface="Libre Franklin" pitchFamily="34" charset="0"/>
+                <a:ea typeface="Libre Franklin" pitchFamily="34" charset="-122"/>
+                <a:cs typeface="Libre Franklin" pitchFamily="34" charset="-120"/>
+              </a:rPr>
+              <a:t>Gemini Enterprise</a:t>
+            </a:r>
+            <a:endParaRPr lang="en-US" sz="1350" dirty="0"/>
+          </a:p>
+        </p:txBody>
+      </p:sp>
+      <p:sp>
+        <p:nvSpPr>
+          <p:cNvPr id="26" name="Shape 24"/>
+          <p:cNvSpPr/>
+          <p:nvPr/>
+        </p:nvSpPr>
+        <p:spPr>
+          <a:xfrm>
+            <a:off x="10431028" y="3753222"/>
+            <a:ext cx="1671712" cy="342900"/>
+          </a:xfrm>
+          <a:prstGeom prst="roundRect">
+            <a:avLst>
+              <a:gd name="adj" fmla="val 50000"/>
+            </a:avLst>
+          </a:prstGeom>
+          <a:solidFill>
+            <a:srgbClr val="0C2C4A"/>
+          </a:solidFill>
+          <a:ln w="9525">
+            <a:solidFill>
+              <a:srgbClr val="0C2C4A"/>
+            </a:solidFill>
+            <a:prstDash val="solid"/>
+          </a:ln>
+          <a:effectLst>
+            <a:outerShdw sx="100000" sy="100000" kx="0" ky="0" algn="bl" rotWithShape="0" blurRad="171450" dist="66675" dir="5400000">
+              <a:srgbClr val="0C2C4A">
+                <a:alpha val="22000"/>
+              </a:srgbClr>
+            </a:outerShdw>
+          </a:effectLst>
+        </p:spPr>
+      </p:sp>
+      <p:sp>
+        <p:nvSpPr>
+          <p:cNvPr id="27" name="Shape 25"/>
+          <p:cNvSpPr/>
+          <p:nvPr/>
+        </p:nvSpPr>
+        <p:spPr>
+          <a:xfrm>
+            <a:off x="10545328" y="3881810"/>
+            <a:ext cx="85725" cy="85725"/>
+          </a:xfrm>
+          <a:prstGeom prst="ellipse">
+            <a:avLst/>
+          </a:prstGeom>
+          <a:solidFill>
+            <a:srgbClr val="3D93D6"/>
+          </a:solidFill>
+          <a:ln/>
+        </p:spPr>
+      </p:sp>
+      <p:sp>
+        <p:nvSpPr>
+          <p:cNvPr id="28" name="Text 26"/>
+          <p:cNvSpPr/>
+          <p:nvPr/>
+        </p:nvSpPr>
+        <p:spPr>
+          <a:xfrm>
+            <a:off x="10716778" y="3838947"/>
+            <a:ext cx="1356918" cy="209550"/>
+          </a:xfrm>
+          <a:prstGeom prst="rect">
+            <a:avLst/>
+          </a:prstGeom>
+          <a:noFill/>
+          <a:ln/>
+        </p:spPr>
+        <p:txBody>
+          <a:bodyPr wrap="none" lIns="25400" tIns="25400" rIns="25400" bIns="25400" rtlCol="0" anchor="t">
+            <a:normAutofit/>
+          </a:bodyPr>
+          <a:lstStyle/>
+          <a:p>
+            <a:pPr algn="l" indent="0" marL="0">
+              <a:lnSpc>
+                <a:spcPct val="100000"/>
+              </a:lnSpc>
+              <a:buNone/>
+            </a:pPr>
+            <a:r>
+              <a:rPr lang="en-US" sz="1350" b="1" dirty="0">
+                <a:solidFill>
+                  <a:srgbClr val="FFFFFF"/>
+                </a:solidFill>
+                <a:latin typeface="Libre Franklin" pitchFamily="34" charset="0"/>
+                <a:ea typeface="Libre Franklin" pitchFamily="34" charset="-122"/>
+                <a:cs typeface="Libre Franklin" pitchFamily="34" charset="-120"/>
+              </a:rPr>
+              <a:t>Claude Cowork</a:t>
+            </a:r>
+            <a:endParaRPr lang="en-US" sz="1350" dirty="0"/>
+          </a:p>
+        </p:txBody>
+      </p:sp>
+      <p:sp>
+        <p:nvSpPr>
+          <p:cNvPr id="29" name="Shape 27"/>
+          <p:cNvSpPr/>
+          <p:nvPr/>
+        </p:nvSpPr>
+        <p:spPr>
+          <a:xfrm>
+            <a:off x="14198464" y="2744986"/>
+            <a:ext cx="1471538" cy="342900"/>
+          </a:xfrm>
+          <a:prstGeom prst="roundRect">
+            <a:avLst>
+              <a:gd name="adj" fmla="val 50000"/>
+            </a:avLst>
+          </a:prstGeom>
+          <a:solidFill>
+            <a:srgbClr val="0C2C4A"/>
+          </a:solidFill>
+          <a:ln w="9525">
+            <a:solidFill>
+              <a:srgbClr val="0C2C4A"/>
+            </a:solidFill>
+            <a:prstDash val="solid"/>
+          </a:ln>
+          <a:effectLst>
+            <a:outerShdw sx="100000" sy="100000" kx="0" ky="0" algn="bl" rotWithShape="0" blurRad="171450" dist="66675" dir="5400000">
+              <a:srgbClr val="0C2C4A">
+                <a:alpha val="22000"/>
+              </a:srgbClr>
+            </a:outerShdw>
+          </a:effectLst>
+        </p:spPr>
+      </p:sp>
+      <p:sp>
+        <p:nvSpPr>
+          <p:cNvPr id="30" name="Shape 28"/>
+          <p:cNvSpPr/>
+          <p:nvPr/>
+        </p:nvSpPr>
+        <p:spPr>
+          <a:xfrm>
+            <a:off x="14312764" y="2873573"/>
+            <a:ext cx="85725" cy="85725"/>
+          </a:xfrm>
+          <a:prstGeom prst="ellipse">
+            <a:avLst/>
+          </a:prstGeom>
+          <a:solidFill>
+            <a:srgbClr val="3D93D6"/>
+          </a:solidFill>
+          <a:ln/>
+        </p:spPr>
+      </p:sp>
+      <p:sp>
+        <p:nvSpPr>
+          <p:cNvPr id="31" name="Text 29"/>
+          <p:cNvSpPr/>
+          <p:nvPr/>
+        </p:nvSpPr>
+        <p:spPr>
+          <a:xfrm>
+            <a:off x="14484214" y="2830711"/>
+            <a:ext cx="1109588" cy="209550"/>
+          </a:xfrm>
+          <a:prstGeom prst="rect">
+            <a:avLst/>
+          </a:prstGeom>
+          <a:noFill/>
+          <a:ln/>
+        </p:spPr>
+        <p:txBody>
+          <a:bodyPr wrap="none" lIns="25400" tIns="25400" rIns="25400" bIns="25400" rtlCol="0" anchor="t">
+            <a:normAutofit/>
+          </a:bodyPr>
+          <a:lstStyle/>
+          <a:p>
+            <a:pPr algn="l" indent="0" marL="0">
+              <a:lnSpc>
+                <a:spcPct val="100000"/>
+              </a:lnSpc>
+              <a:buNone/>
+            </a:pPr>
+            <a:r>
+              <a:rPr lang="en-US" sz="1350" b="1" dirty="0">
+                <a:solidFill>
+                  <a:srgbClr val="FFFFFF"/>
+                </a:solidFill>
+                <a:latin typeface="Libre Franklin" pitchFamily="34" charset="0"/>
+                <a:ea typeface="Libre Franklin" pitchFamily="34" charset="-122"/>
+                <a:cs typeface="Libre Franklin" pitchFamily="34" charset="-120"/>
+              </a:rPr>
+              <a:t>Claude Code</a:t>
+            </a:r>
+            <a:endParaRPr lang="en-US" sz="1350" dirty="0"/>
+          </a:p>
+        </p:txBody>
+      </p:sp>
+      <p:sp>
+        <p:nvSpPr>
+          <p:cNvPr id="32" name="Text 30"/>
+          <p:cNvSpPr/>
+          <p:nvPr/>
+        </p:nvSpPr>
+        <p:spPr>
+          <a:xfrm>
+            <a:off x="1371600" y="9296400"/>
+            <a:ext cx="2309716" cy="171450"/>
+          </a:xfrm>
+          <a:prstGeom prst="rect">
+            <a:avLst/>
+          </a:prstGeom>
+          <a:noFill/>
+          <a:ln/>
+        </p:spPr>
+        <p:txBody>
+          <a:bodyPr wrap="square" lIns="25400" tIns="25400" rIns="25400" bIns="25400" rtlCol="0" anchor="t">
+            <a:normAutofit/>
+          </a:bodyPr>
+          <a:lstStyle/>
+          <a:p>
+            <a:pPr algn="l" indent="0" marL="0">
+              <a:lnSpc>
+                <a:spcPct val="100000"/>
+              </a:lnSpc>
+              <a:buNone/>
+            </a:pPr>
+            <a:r>
+              <a:rPr lang="en-US" sz="1050" b="1" spc="84" kern="0" dirty="0">
+                <a:solidFill>
+                  <a:srgbClr val="566573"/>
+                </a:solidFill>
+                <a:latin typeface="Libre Franklin" pitchFamily="34" charset="0"/>
+                <a:ea typeface="Libre Franklin" pitchFamily="34" charset="-122"/>
+                <a:cs typeface="Libre Franklin" pitchFamily="34" charset="-120"/>
+              </a:rPr>
+              <a:t>EVERYDAY · FOR EVERYONE</a:t>
+            </a:r>
+            <a:endParaRPr lang="en-US" sz="1050" dirty="0"/>
+          </a:p>
+        </p:txBody>
+      </p:sp>
+      <p:sp>
+        <p:nvSpPr>
+          <p:cNvPr id="33" name="Text 31"/>
+          <p:cNvSpPr/>
+          <p:nvPr/>
+        </p:nvSpPr>
+        <p:spPr>
+          <a:xfrm>
+            <a:off x="8969722" y="9296400"/>
+            <a:ext cx="1577846" cy="171450"/>
+          </a:xfrm>
+          <a:prstGeom prst="rect">
+            <a:avLst/>
+          </a:prstGeom>
+          <a:noFill/>
+          <a:ln/>
+        </p:spPr>
+        <p:txBody>
+          <a:bodyPr wrap="square" lIns="25400" tIns="25400" rIns="25400" bIns="25400" rtlCol="0" anchor="t">
+            <a:normAutofit/>
+          </a:bodyPr>
+          <a:lstStyle/>
+          <a:p>
+            <a:pPr algn="l" indent="0" marL="0">
+              <a:lnSpc>
+                <a:spcPct val="100000"/>
+              </a:lnSpc>
+              <a:buNone/>
+            </a:pPr>
+            <a:r>
+              <a:rPr lang="en-US" sz="1050" b="1" spc="168" kern="0" dirty="0">
+                <a:solidFill>
+                  <a:srgbClr val="94A2AE"/>
+                </a:solidFill>
+                <a:latin typeface="Libre Franklin" pitchFamily="34" charset="0"/>
+                <a:ea typeface="Libre Franklin" pitchFamily="34" charset="-122"/>
+                <a:cs typeface="Libre Franklin" pitchFamily="34" charset="-120"/>
+              </a:rPr>
+              <a:t>DEPTH OF USE →</a:t>
+            </a:r>
+            <a:endParaRPr lang="en-US" sz="1050" dirty="0"/>
+          </a:p>
+        </p:txBody>
+      </p:sp>
+      <p:sp>
+        <p:nvSpPr>
+          <p:cNvPr id="34" name="Text 32"/>
+          <p:cNvSpPr/>
+          <p:nvPr/>
+        </p:nvSpPr>
+        <p:spPr>
+          <a:xfrm>
+            <a:off x="15902508" y="9296400"/>
+            <a:ext cx="1576291" cy="171450"/>
+          </a:xfrm>
+          <a:prstGeom prst="rect">
+            <a:avLst/>
+          </a:prstGeom>
+          <a:noFill/>
+          <a:ln/>
+        </p:spPr>
+        <p:txBody>
+          <a:bodyPr wrap="square" lIns="25400" tIns="25400" rIns="25400" bIns="25400" rtlCol="0" anchor="t">
+            <a:normAutofit/>
+          </a:bodyPr>
+          <a:lstStyle/>
+          <a:p>
+            <a:pPr algn="l" indent="0" marL="0">
+              <a:lnSpc>
+                <a:spcPct val="100000"/>
+              </a:lnSpc>
+              <a:buNone/>
+            </a:pPr>
+            <a:r>
+              <a:rPr lang="en-US" sz="1050" b="1" spc="84" kern="0" dirty="0">
+                <a:solidFill>
+                  <a:srgbClr val="566573"/>
+                </a:solidFill>
+                <a:latin typeface="Libre Franklin" pitchFamily="34" charset="0"/>
+                <a:ea typeface="Libre Franklin" pitchFamily="34" charset="-122"/>
+                <a:cs typeface="Libre Franklin" pitchFamily="34" charset="-120"/>
+              </a:rPr>
+              <a:t>SPECIALIST · DEEP</a:t>
+            </a:r>
+            <a:endParaRPr lang="en-US" sz="1050" dirty="0"/>
+          </a:p>
+        </p:txBody>
+      </p:sp>
+      <p:sp>
+        <p:nvSpPr>
+          <p:cNvPr id="35" name="Shape 33"/>
+          <p:cNvSpPr/>
+          <p:nvPr/>
+        </p:nvSpPr>
+        <p:spPr>
+          <a:xfrm>
+            <a:off x="952500" y="9601200"/>
+            <a:ext cx="16383000" cy="9525"/>
+          </a:xfrm>
+          <a:prstGeom prst="rect">
+            <a:avLst/>
+          </a:prstGeom>
+          <a:solidFill>
+            <a:srgbClr val="E5EBF1"/>
+          </a:solidFill>
+          <a:ln/>
+        </p:spPr>
+      </p:sp>
+      <p:sp>
+        <p:nvSpPr>
+          <p:cNvPr id="36" name="Shape 34"/>
+          <p:cNvSpPr/>
+          <p:nvPr/>
+        </p:nvSpPr>
+        <p:spPr>
+          <a:xfrm>
+            <a:off x="952500" y="9767888"/>
+            <a:ext cx="133350" cy="133350"/>
+          </a:xfrm>
+          <a:prstGeom prst="ellipse">
+            <a:avLst/>
+          </a:prstGeom>
+          <a:solidFill>
+            <a:srgbClr val="FFFFFF"/>
+          </a:solidFill>
+          <a:ln w="14288">
+            <a:solidFill>
+              <a:srgbClr val="CADFF1"/>
+            </a:solidFill>
+            <a:prstDash val="solid"/>
+          </a:ln>
+        </p:spPr>
+      </p:sp>
+      <p:sp>
+        <p:nvSpPr>
+          <p:cNvPr id="37" name="Text 35"/>
+          <p:cNvSpPr/>
+          <p:nvPr/>
+        </p:nvSpPr>
+        <p:spPr>
+          <a:xfrm>
+            <a:off x="1171575" y="9748838"/>
+            <a:ext cx="1441028" cy="209550"/>
+          </a:xfrm>
+          <a:prstGeom prst="rect">
+            <a:avLst/>
+          </a:prstGeom>
+          <a:noFill/>
+          <a:ln/>
+        </p:spPr>
+        <p:txBody>
+          <a:bodyPr wrap="square" lIns="0" tIns="0" rIns="0" bIns="0" rtlCol="0" anchor="t">
+            <a:normAutofit/>
+          </a:bodyPr>
+          <a:lstStyle/>
+          <a:p>
+            <a:pPr algn="l" indent="0" marL="0">
+              <a:lnSpc>
+                <a:spcPct val="100000"/>
+              </a:lnSpc>
+              <a:buNone/>
+            </a:pPr>
+            <a:r>
+              <a:rPr lang="en-US" sz="1125" spc="45" kern="0" dirty="0">
+                <a:solidFill>
+                  <a:srgbClr val="566573"/>
+                </a:solidFill>
+                <a:latin typeface="Libre Franklin" pitchFamily="34" charset="0"/>
+                <a:ea typeface="Libre Franklin" pitchFamily="34" charset="-122"/>
+                <a:cs typeface="Libre Franklin" pitchFamily="34" charset="-120"/>
+              </a:rPr>
+              <a:t>Google Workspace</a:t>
+            </a:r>
+            <a:endParaRPr lang="en-US" sz="1125" dirty="0"/>
+          </a:p>
+        </p:txBody>
+      </p:sp>
+      <p:sp>
+        <p:nvSpPr>
+          <p:cNvPr id="38" name="Shape 36"/>
+          <p:cNvSpPr/>
+          <p:nvPr/>
+        </p:nvSpPr>
+        <p:spPr>
+          <a:xfrm>
+            <a:off x="2784053" y="9782175"/>
+            <a:ext cx="104775" cy="104775"/>
+          </a:xfrm>
+          <a:prstGeom prst="ellipse">
+            <a:avLst/>
+          </a:prstGeom>
+          <a:solidFill>
+            <a:srgbClr val="0C2C4A"/>
+          </a:solidFill>
+          <a:ln/>
+        </p:spPr>
+      </p:sp>
+      <p:sp>
+        <p:nvSpPr>
+          <p:cNvPr id="39" name="Text 37"/>
+          <p:cNvSpPr/>
+          <p:nvPr/>
+        </p:nvSpPr>
+        <p:spPr>
+          <a:xfrm>
+            <a:off x="2974553" y="9748838"/>
+            <a:ext cx="579165" cy="209550"/>
+          </a:xfrm>
+          <a:prstGeom prst="rect">
+            <a:avLst/>
+          </a:prstGeom>
+          <a:noFill/>
+          <a:ln/>
+        </p:spPr>
+        <p:txBody>
+          <a:bodyPr wrap="square" lIns="0" tIns="0" rIns="0" bIns="0" rtlCol="0" anchor="t">
+            <a:normAutofit/>
+          </a:bodyPr>
+          <a:lstStyle/>
+          <a:p>
+            <a:pPr algn="l" indent="0" marL="0">
+              <a:lnSpc>
+                <a:spcPct val="100000"/>
+              </a:lnSpc>
+              <a:buNone/>
+            </a:pPr>
+            <a:r>
+              <a:rPr lang="en-US" sz="1125" spc="45" kern="0" dirty="0">
+                <a:solidFill>
+                  <a:srgbClr val="566573"/>
+                </a:solidFill>
+                <a:latin typeface="Libre Franklin" pitchFamily="34" charset="0"/>
+                <a:ea typeface="Libre Franklin" pitchFamily="34" charset="-122"/>
+                <a:cs typeface="Libre Franklin" pitchFamily="34" charset="-120"/>
+              </a:rPr>
+              <a:t>Claude</a:t>
+            </a:r>
+            <a:endParaRPr lang="en-US" sz="1125" dirty="0"/>
+          </a:p>
+        </p:txBody>
+      </p:sp>
+      <p:sp>
+        <p:nvSpPr>
+          <p:cNvPr id="40" name="Text 38"/>
+          <p:cNvSpPr/>
+          <p:nvPr/>
+        </p:nvSpPr>
+        <p:spPr>
+          <a:xfrm>
+            <a:off x="16880607" y="9763125"/>
+            <a:ext cx="531093" cy="180975"/>
+          </a:xfrm>
+          <a:prstGeom prst="rect">
+            <a:avLst/>
+          </a:prstGeom>
+          <a:noFill/>
+          <a:ln/>
+        </p:spPr>
+        <p:txBody>
+          <a:bodyPr wrap="square" lIns="25400" tIns="25400" rIns="25400" bIns="25400" rtlCol="0" anchor="t">
+            <a:normAutofit/>
+          </a:bodyPr>
+          <a:lstStyle/>
+          <a:p>
+            <a:pPr algn="l" indent="0" marL="0">
+              <a:lnSpc>
+                <a:spcPct val="100000"/>
+              </a:lnSpc>
+              <a:buNone/>
+            </a:pPr>
+            <a:r>
+              <a:rPr lang="en-US" sz="1125" spc="45" kern="0" dirty="0">
+                <a:solidFill>
+                  <a:srgbClr val="94A2AE"/>
+                </a:solidFill>
+                <a:latin typeface="Libre Franklin" pitchFamily="34" charset="0"/>
+                <a:ea typeface="Libre Franklin" pitchFamily="34" charset="-122"/>
+                <a:cs typeface="Libre Franklin" pitchFamily="34" charset="-120"/>
+              </a:rPr>
+              <a:t>10 / 11</a:t>
+            </a:r>
+            <a:endParaRPr lang="en-US" sz="1125" dirty="0"/>
+          </a:p>
+        </p:txBody>
+      </p:sp>
+    </p:spTree>
+  </p:cSld>
+  <p:clrMapOvr>
+    <a:masterClrMapping/>
+  </p:clrMapOvr>
+</p:sld>
+</file>
+
+<file path=ppt/slides/slide11.xml><?xml version="1.0" encoding="utf-8"?>
+<p:sld xmlns:a="http://schemas.openxmlformats.org/drawingml/2006/main" xmlns:r="http://schemas.openxmlformats.org/officeDocument/2006/relationships" xmlns:p="http://schemas.openxmlformats.org/presentationml/2006/main">
+  <p:cSld name="Slide 11">
+    <p:bg>
+      <p:bgPr>
+        <a:solidFill>
+          <a:srgbClr val="F6F9FC"/>
+        </a:solidFill>
+      </p:bgPr>
+    </p:bg>
+    <p:spTree>
+      <p:nvGrpSpPr>
+        <p:cNvPr id="1" name=""/>
+        <p:cNvGrpSpPr/>
+        <p:nvPr/>
+      </p:nvGrpSpPr>
+      <p:grpSpPr>
+        <a:xfrm>
+          <a:off x="0" y="0"/>
+          <a:ext cx="0" cy="0"/>
+          <a:chOff x="0" y="0"/>
+          <a:chExt cx="0" cy="0"/>
+        </a:xfrm>
+      </p:grpSpPr>
+      <p:sp>
+        <p:nvSpPr>
+          <p:cNvPr id="2" name="Text 0"/>
+          <p:cNvSpPr/>
+          <p:nvPr/>
+        </p:nvSpPr>
+        <p:spPr>
+          <a:xfrm>
+            <a:off x="952500" y="533400"/>
+            <a:ext cx="18021300" cy="190500"/>
+          </a:xfrm>
+          <a:prstGeom prst="rect">
+            <a:avLst/>
+          </a:prstGeom>
+          <a:noFill/>
+          <a:ln/>
+        </p:spPr>
+        <p:txBody>
+          <a:bodyPr wrap="square" lIns="25400" tIns="25400" rIns="25400" bIns="25400" rtlCol="0" anchor="t">
+            <a:normAutofit/>
+          </a:bodyPr>
+          <a:lstStyle/>
+          <a:p>
+            <a:pPr algn="l" indent="0" marL="0">
+              <a:lnSpc>
+                <a:spcPct val="100000"/>
+              </a:lnSpc>
+              <a:buNone/>
+            </a:pPr>
+            <a:r>
+              <a:rPr lang="en-US" sz="1200" b="1" spc="240" kern="0" dirty="0">
+                <a:solidFill>
+                  <a:srgbClr val="1E73B8"/>
+                </a:solidFill>
+                <a:latin typeface="Libre Franklin" pitchFamily="34" charset="0"/>
+                <a:ea typeface="Libre Franklin" pitchFamily="34" charset="-122"/>
+                <a:cs typeface="Libre Franklin" pitchFamily="34" charset="-120"/>
+              </a:rPr>
+              <a:t>Q&amp;A · DISCUSSION · 11</a:t>
             </a:r>
             <a:endParaRPr lang="en-US" sz="1200" dirty="0"/>
           </a:p>
@@ -2876,8 +4406,8 @@
         </p:nvSpPr>
         <p:spPr>
           <a:xfrm>
-            <a:off x="16849799" y="9763125"/>
-            <a:ext cx="561901" cy="180975"/>
+            <a:off x="16911340" y="9763125"/>
+            <a:ext cx="500360" cy="180975"/>
           </a:xfrm>
           <a:prstGeom prst="rect">
             <a:avLst/>
@@ -2906,7 +4436,7 @@
                 <a:ea typeface="Libre Franklin" pitchFamily="34" charset="-122"/>
                 <a:cs typeface="Libre Franklin" pitchFamily="34" charset="-120"/>
               </a:rPr>
-              <a:t>10 / 10</a:t>
+              <a:t>11 / 11</a:t>
             </a:r>
             <a:endParaRPr lang="en-US" sz="1125" dirty="0"/>
           </a:p>
@@ -4665,8 +6195,8 @@
         </p:nvSpPr>
         <p:spPr>
           <a:xfrm>
-            <a:off x="16830601" y="9763125"/>
-            <a:ext cx="581099" cy="180975"/>
+            <a:off x="16861408" y="9763125"/>
+            <a:ext cx="550292" cy="180975"/>
           </a:xfrm>
           <a:prstGeom prst="rect">
             <a:avLst/>
@@ -4695,7 +6225,7 @@
                 <a:ea typeface="Libre Franklin" pitchFamily="34" charset="-122"/>
                 <a:cs typeface="Libre Franklin" pitchFamily="34" charset="-120"/>
               </a:rPr>
-              <a:t>02 / 10</a:t>
+              <a:t>02 / 11</a:t>
             </a:r>
             <a:endParaRPr lang="en-US" sz="1125" dirty="0"/>
           </a:p>
@@ -5764,8 +7294,8 @@
         </p:nvSpPr>
         <p:spPr>
           <a:xfrm>
-            <a:off x="16825466" y="9763125"/>
-            <a:ext cx="586234" cy="180975"/>
+            <a:off x="16856273" y="9763125"/>
+            <a:ext cx="555427" cy="180975"/>
           </a:xfrm>
           <a:prstGeom prst="rect">
             <a:avLst/>
@@ -5794,7 +7324,7 @@
                 <a:ea typeface="Libre Franklin" pitchFamily="34" charset="-122"/>
                 <a:cs typeface="Libre Franklin" pitchFamily="34" charset="-120"/>
               </a:rPr>
-              <a:t>03 / 10</a:t>
+              <a:t>03 / 11</a:t>
             </a:r>
             <a:endParaRPr lang="en-US" sz="1125" dirty="0"/>
           </a:p>
@@ -7742,8 +9272,8 @@
         </p:nvSpPr>
         <p:spPr>
           <a:xfrm>
-            <a:off x="16823680" y="9801225"/>
-            <a:ext cx="588020" cy="180975"/>
+            <a:off x="16854488" y="9801225"/>
+            <a:ext cx="557213" cy="180975"/>
           </a:xfrm>
           <a:prstGeom prst="rect">
             <a:avLst/>
@@ -7772,7 +9302,7 @@
                 <a:ea typeface="Libre Franklin" pitchFamily="34" charset="-122"/>
                 <a:cs typeface="Libre Franklin" pitchFamily="34" charset="-120"/>
               </a:rPr>
-              <a:t>04 / 10</a:t>
+              <a:t>04 / 11</a:t>
             </a:r>
             <a:endParaRPr lang="en-US" sz="1125" dirty="0"/>
           </a:p>
@@ -9437,8 +10967,8 @@
         </p:nvSpPr>
         <p:spPr>
           <a:xfrm>
-            <a:off x="16823754" y="9763125"/>
-            <a:ext cx="587946" cy="180975"/>
+            <a:off x="16854488" y="9763125"/>
+            <a:ext cx="557213" cy="180975"/>
           </a:xfrm>
           <a:prstGeom prst="rect">
             <a:avLst/>
@@ -9467,7 +10997,7 @@
                 <a:ea typeface="Libre Franklin" pitchFamily="34" charset="-122"/>
                 <a:cs typeface="Libre Franklin" pitchFamily="34" charset="-120"/>
               </a:rPr>
-              <a:t>05 / 10</a:t>
+              <a:t>05 / 11</a:t>
             </a:r>
             <a:endParaRPr lang="en-US" sz="1125" dirty="0"/>
           </a:p>
@@ -10971,8 +12501,8 @@
         </p:nvSpPr>
         <p:spPr>
           <a:xfrm>
-            <a:off x="16822638" y="9763125"/>
-            <a:ext cx="589062" cy="180975"/>
+            <a:off x="16853446" y="9763125"/>
+            <a:ext cx="558254" cy="180975"/>
           </a:xfrm>
           <a:prstGeom prst="rect">
             <a:avLst/>
@@ -11001,7 +12531,7 @@
                 <a:ea typeface="Libre Franklin" pitchFamily="34" charset="-122"/>
                 <a:cs typeface="Libre Franklin" pitchFamily="34" charset="-120"/>
               </a:rPr>
-              <a:t>06 / 10</a:t>
+              <a:t>06 / 11</a:t>
             </a:r>
             <a:endParaRPr lang="en-US" sz="1125" dirty="0"/>
           </a:p>
@@ -12115,8 +13645,8 @@
         </p:nvSpPr>
         <p:spPr>
           <a:xfrm>
-            <a:off x="16831642" y="9763125"/>
-            <a:ext cx="580058" cy="180975"/>
+            <a:off x="16862450" y="9763125"/>
+            <a:ext cx="549250" cy="180975"/>
           </a:xfrm>
           <a:prstGeom prst="rect">
             <a:avLst/>
@@ -12145,7 +13675,7 @@
                 <a:ea typeface="Libre Franklin" pitchFamily="34" charset="-122"/>
                 <a:cs typeface="Libre Franklin" pitchFamily="34" charset="-120"/>
               </a:rPr>
-              <a:t>07 / 10</a:t>
+              <a:t>07 / 11</a:t>
             </a:r>
             <a:endParaRPr lang="en-US" sz="1125" dirty="0"/>
           </a:p>
@@ -13504,8 +15034,8 @@
         </p:nvSpPr>
         <p:spPr>
           <a:xfrm>
-            <a:off x="16822043" y="9763125"/>
-            <a:ext cx="589657" cy="180975"/>
+            <a:off x="16852850" y="9763125"/>
+            <a:ext cx="558850" cy="180975"/>
           </a:xfrm>
           <a:prstGeom prst="rect">
             <a:avLst/>
@@ -13534,7 +15064,7 @@
                 <a:ea typeface="Libre Franklin" pitchFamily="34" charset="-122"/>
                 <a:cs typeface="Libre Franklin" pitchFamily="34" charset="-120"/>
               </a:rPr>
-              <a:t>08 / 10</a:t>
+              <a:t>08 / 11</a:t>
             </a:r>
             <a:endParaRPr lang="en-US" sz="1125" dirty="0"/>
           </a:p>
@@ -14482,8 +16012,8 @@
         </p:nvSpPr>
         <p:spPr>
           <a:xfrm>
-            <a:off x="16823085" y="9763125"/>
-            <a:ext cx="588615" cy="180975"/>
+            <a:off x="16853892" y="9763125"/>
+            <a:ext cx="557808" cy="180975"/>
           </a:xfrm>
           <a:prstGeom prst="rect">
             <a:avLst/>
@@ -14512,7 +16042,7 @@
                 <a:ea typeface="Libre Franklin" pitchFamily="34" charset="-122"/>
                 <a:cs typeface="Libre Franklin" pitchFamily="34" charset="-120"/>
               </a:rPr>
-              <a:t>09 / 10</a:t>
+              <a:t>09 / 11</a:t>
             </a:r>
             <a:endParaRPr lang="en-US" sz="1125" dirty="0"/>
           </a:p>

--- a/Enterprise_design_refinement.pptx
+++ b/Enterprise_design_refinement.pptx
@@ -600,7 +600,7 @@
           <a:p>
             <a:r>
               <a:rPr lang="en-US" dirty="0"/>
-              <a:t>This maps the AI tools everyone has access to on two axes. Horizontal is depth of use — everyday, for-everyone tools on the left, specialist and deep tools on the right. Vertical is power — assistive help at the bottom, autonomous agents at the top. Google Workspace tools cluster in everyday assist and automation; Claude tools sit in the higher-power, more specialist agentic space. The axes are one useful cut — we can reframe them (learning curve, autonomy, data sensitivity) if that's more useful for the audience.</a:t>
+              <a:t>This maps the AI tools everyone has access to on two axes. Horizontal is depth of use — everyday, for-everyone tools on the left, specialist and deep tools on the right. Vertical is power — assistive help at the bottom, autonomous agents at the top. Google Workspace tools cluster in everyday assist and automation; Claude tools sit in the higher-power, more specialist agentic space. Two are flagged as not yet live in our environment — Gemini Enterprise and Claude Cowork. And note the gap on Claude Code: the full-capability ceiling is up and to the right, but what we actually run today is the sandbox version on Opus 4.7 — hence the headroom arrow. The axes are one useful cut — we can reframe them (learning curve, autonomy, data sensitivity) if that's more useful for the audience.</a:t>
             </a:r>
             <a:endParaRPr lang="en-US" dirty="0"/>
           </a:p>
@@ -2316,7 +2316,7 @@
         <p:spPr>
           <a:xfrm>
             <a:off x="952500" y="1414463"/>
-            <a:ext cx="12573000" cy="384795"/>
+            <a:ext cx="11772900" cy="731490"/>
           </a:xfrm>
           <a:prstGeom prst="rect">
             <a:avLst/>
@@ -2345,7 +2345,7 @@
                 <a:ea typeface="Libre Franklin" pitchFamily="34" charset="-122"/>
                 <a:cs typeface="Libre Franklin" pitchFamily="34" charset="-120"/>
               </a:rPr>
-              <a:t>Every tool you have access to — placed by how deep the work goes and how much it does for you.</a:t>
+              <a:t>Placed by how deep the work goes and how much it does for you — and flagged by what's live in our environment today.</a:t>
             </a:r>
             <a:endParaRPr lang="en-US" sz="1950" dirty="0"/>
           </a:p>
@@ -2359,7 +2359,7 @@
         </p:nvSpPr>
         <p:spPr>
           <a:xfrm rot="-5400000">
-            <a:off x="-295275" y="5633517"/>
+            <a:off x="-295275" y="5806901"/>
             <a:ext cx="2864739" cy="171450"/>
           </a:xfrm>
           <a:prstGeom prst="rect">
@@ -2403,12 +2403,12 @@
         </p:nvSpPr>
         <p:spPr>
           <a:xfrm>
-            <a:off x="1371600" y="1970708"/>
-            <a:ext cx="15963900" cy="7220917"/>
+            <a:off x="1371600" y="2317403"/>
+            <a:ext cx="15963900" cy="6874222"/>
           </a:xfrm>
           <a:prstGeom prst="roundRect">
             <a:avLst>
-              <a:gd name="adj" fmla="val 1319"/>
+              <a:gd name="adj" fmla="val 1386"/>
             </a:avLst>
           </a:prstGeom>
           <a:solidFill>
@@ -2437,8 +2437,8 @@
         </p:nvSpPr>
         <p:spPr>
           <a:xfrm>
-            <a:off x="9353550" y="1980233"/>
-            <a:ext cx="9525" cy="7201867"/>
+            <a:off x="9353550" y="2326928"/>
+            <a:ext cx="9525" cy="6855172"/>
           </a:xfrm>
           <a:prstGeom prst="rect">
             <a:avLst/>
@@ -2457,7 +2457,7 @@
         </p:nvSpPr>
         <p:spPr>
           <a:xfrm>
-            <a:off x="1381125" y="5581129"/>
+            <a:off x="1381125" y="5754514"/>
             <a:ext cx="15944850" cy="9525"/>
           </a:xfrm>
           <a:prstGeom prst="rect">
@@ -2477,8 +2477,8 @@
         </p:nvSpPr>
         <p:spPr>
           <a:xfrm>
-            <a:off x="9353550" y="1980233"/>
-            <a:ext cx="7972425" cy="3600896"/>
+            <a:off x="9353550" y="2326928"/>
+            <a:ext cx="7972425" cy="3427586"/>
           </a:xfrm>
           <a:prstGeom prst="rect">
             <a:avLst/>
@@ -2509,7 +2509,7 @@
         </p:nvSpPr>
         <p:spPr>
           <a:xfrm>
-            <a:off x="1609725" y="2151683"/>
+            <a:off x="1609725" y="2498378"/>
             <a:ext cx="2064149" cy="199058"/>
           </a:xfrm>
           <a:prstGeom prst="rect">
@@ -2553,7 +2553,7 @@
         </p:nvSpPr>
         <p:spPr>
           <a:xfrm>
-            <a:off x="14803621" y="2151683"/>
+            <a:off x="14803621" y="2498378"/>
             <a:ext cx="2293754" cy="199058"/>
           </a:xfrm>
           <a:prstGeom prst="rect">
@@ -2677,15 +2677,89 @@
           </a:p>
         </p:txBody>
       </p:sp>
-      <p:sp>
-        <p:nvSpPr>
-          <p:cNvPr id="14" name="Shape 12"/>
-          <p:cNvSpPr/>
-          <p:nvPr/>
-        </p:nvSpPr>
-        <p:spPr>
-          <a:xfrm>
-            <a:off x="2969977" y="7498184"/>
+      <p:pic>
+        <p:nvPicPr>
+          <p:cNvPr id="14" name="Image 0" descr="preencoded.png">    </p:cNvPr>
+          <p:cNvPicPr>
+            <a:picLocks noChangeAspect="1"/>
+          </p:cNvPicPr>
+          <p:nvPr/>
+        </p:nvPicPr>
+        <p:blipFill>
+          <a:blip r:embed="rId1">
+            <a:extLst>
+              <a:ext uri="{96DAC541-7B7A-43D3-8B79-37D633B846F1}">
+                <asvg:svgBlip xmlns:asvg="http://schemas.microsoft.com/office/drawing/2016/SVG/main" r:embed="rId2"/>
+              </a:ext>
+            </a:extLst>
+          </a:blip>
+          <a:stretch>
+            <a:fillRect/>
+          </a:stretch>
+        </p:blipFill>
+        <p:spPr>
+          <a:xfrm>
+            <a:off x="1381125" y="2326928"/>
+            <a:ext cx="15944850" cy="6855172"/>
+          </a:xfrm>
+          <a:prstGeom prst="rect">
+            <a:avLst/>
+          </a:prstGeom>
+        </p:spPr>
+      </p:pic>
+      <p:sp>
+        <p:nvSpPr>
+          <p:cNvPr id="15" name="Text 12"/>
+          <p:cNvSpPr/>
+          <p:nvPr/>
+        </p:nvSpPr>
+        <p:spPr>
+          <a:xfrm rot="-1860000">
+            <a:off x="13151495" y="4301505"/>
+            <a:ext cx="771525" cy="133350"/>
+          </a:xfrm>
+          <a:prstGeom prst="rect">
+            <a:avLst/>
+          </a:prstGeom>
+          <a:noFill/>
+          <a:ln/>
+        </p:spPr>
+        <p:txBody>
+          <a:bodyPr wrap="none" lIns="25400" tIns="25400" rIns="25400" bIns="25400" rtlCol="0" anchor="t">
+            <a:normAutofit/>
+          </a:bodyPr>
+          <a:lstStyle/>
+          <a:p>
+            <a:pPr algn="l" indent="0" marL="0">
+              <a:lnSpc>
+                <a:spcPct val="100000"/>
+              </a:lnSpc>
+              <a:buNone/>
+            </a:pPr>
+            <a:r>
+              <a:rPr lang="en-US" sz="750" b="1" spc="105" kern="0" dirty="0">
+                <a:solidFill>
+                  <a:srgbClr val="94A2AE"/>
+                </a:solidFill>
+                <a:latin typeface="Libre Franklin" pitchFamily="34" charset="0"/>
+                <a:ea typeface="Libre Franklin" pitchFamily="34" charset="-122"/>
+                <a:cs typeface="Libre Franklin" pitchFamily="34" charset="-120"/>
+              </a:rPr>
+              <a:t>HEADROOM</a:t>
+            </a:r>
+            <a:endParaRPr lang="en-US" sz="750" dirty="0"/>
+          </a:p>
+        </p:txBody>
+      </p:sp>
+      <p:sp>
+        <p:nvSpPr>
+          <p:cNvPr id="16" name="Shape 13"/>
+          <p:cNvSpPr/>
+          <p:nvPr/>
+        </p:nvSpPr>
+        <p:spPr>
+          <a:xfrm>
+            <a:off x="2969977" y="7571036"/>
             <a:ext cx="2243510" cy="342900"/>
           </a:xfrm>
           <a:prstGeom prst="roundRect">
@@ -2713,13 +2787,13 @@
       </p:sp>
       <p:sp>
         <p:nvSpPr>
-          <p:cNvPr id="15" name="Shape 13"/>
-          <p:cNvSpPr/>
-          <p:nvPr/>
-        </p:nvSpPr>
-        <p:spPr>
-          <a:xfrm>
-            <a:off x="3084277" y="7626772"/>
+          <p:cNvPr id="17" name="Shape 14"/>
+          <p:cNvSpPr/>
+          <p:nvPr/>
+        </p:nvSpPr>
+        <p:spPr>
+          <a:xfrm>
+            <a:off x="3084277" y="7699623"/>
             <a:ext cx="85725" cy="85725"/>
           </a:xfrm>
           <a:prstGeom prst="ellipse">
@@ -2733,13 +2807,13 @@
       </p:sp>
       <p:sp>
         <p:nvSpPr>
-          <p:cNvPr id="16" name="Text 14"/>
-          <p:cNvSpPr/>
-          <p:nvPr/>
-        </p:nvSpPr>
-        <p:spPr>
-          <a:xfrm>
-            <a:off x="3255727" y="7583909"/>
+          <p:cNvPr id="18" name="Text 15"/>
+          <p:cNvSpPr/>
+          <p:nvPr/>
+        </p:nvSpPr>
+        <p:spPr>
+          <a:xfrm>
+            <a:off x="3255727" y="7656761"/>
             <a:ext cx="1985896" cy="209550"/>
           </a:xfrm>
           <a:prstGeom prst="rect">
@@ -2777,13 +2851,13 @@
       </p:sp>
       <p:sp>
         <p:nvSpPr>
-          <p:cNvPr id="17" name="Shape 15"/>
-          <p:cNvSpPr/>
-          <p:nvPr/>
-        </p:nvSpPr>
-        <p:spPr>
-          <a:xfrm>
-            <a:off x="6523769" y="6489948"/>
+          <p:cNvPr id="19" name="Shape 16"/>
+          <p:cNvSpPr/>
+          <p:nvPr/>
+        </p:nvSpPr>
+        <p:spPr>
+          <a:xfrm>
+            <a:off x="6523769" y="6611317"/>
             <a:ext cx="1513805" cy="342900"/>
           </a:xfrm>
           <a:prstGeom prst="roundRect">
@@ -2811,13 +2885,13 @@
       </p:sp>
       <p:sp>
         <p:nvSpPr>
-          <p:cNvPr id="18" name="Shape 16"/>
-          <p:cNvSpPr/>
-          <p:nvPr/>
-        </p:nvSpPr>
-        <p:spPr>
-          <a:xfrm>
-            <a:off x="6638069" y="6618536"/>
+          <p:cNvPr id="20" name="Shape 17"/>
+          <p:cNvSpPr/>
+          <p:nvPr/>
+        </p:nvSpPr>
+        <p:spPr>
+          <a:xfrm>
+            <a:off x="6638069" y="6739905"/>
             <a:ext cx="85725" cy="85725"/>
           </a:xfrm>
           <a:prstGeom prst="ellipse">
@@ -2831,13 +2905,13 @@
       </p:sp>
       <p:sp>
         <p:nvSpPr>
-          <p:cNvPr id="19" name="Text 17"/>
-          <p:cNvSpPr/>
-          <p:nvPr/>
-        </p:nvSpPr>
-        <p:spPr>
-          <a:xfrm>
-            <a:off x="6809519" y="6575673"/>
+          <p:cNvPr id="21" name="Text 18"/>
+          <p:cNvSpPr/>
+          <p:nvPr/>
+        </p:nvSpPr>
+        <p:spPr>
+          <a:xfrm>
+            <a:off x="6809519" y="6697042"/>
             <a:ext cx="1151855" cy="209550"/>
           </a:xfrm>
           <a:prstGeom prst="rect">
@@ -2875,13 +2949,13 @@
       </p:sp>
       <p:sp>
         <p:nvSpPr>
-          <p:cNvPr id="20" name="Shape 18"/>
-          <p:cNvSpPr/>
-          <p:nvPr/>
-        </p:nvSpPr>
-        <p:spPr>
-          <a:xfrm>
-            <a:off x="5200315" y="4113312"/>
+          <p:cNvPr id="22" name="Shape 19"/>
+          <p:cNvSpPr/>
+          <p:nvPr/>
+        </p:nvSpPr>
+        <p:spPr>
+          <a:xfrm>
+            <a:off x="5040846" y="4349130"/>
             <a:ext cx="1928440" cy="342900"/>
           </a:xfrm>
           <a:prstGeom prst="roundRect">
@@ -2909,13 +2983,13 @@
       </p:sp>
       <p:sp>
         <p:nvSpPr>
-          <p:cNvPr id="21" name="Shape 19"/>
-          <p:cNvSpPr/>
-          <p:nvPr/>
-        </p:nvSpPr>
-        <p:spPr>
-          <a:xfrm>
-            <a:off x="5314615" y="4241899"/>
+          <p:cNvPr id="23" name="Shape 20"/>
+          <p:cNvSpPr/>
+          <p:nvPr/>
+        </p:nvSpPr>
+        <p:spPr>
+          <a:xfrm>
+            <a:off x="5155146" y="4477717"/>
             <a:ext cx="85725" cy="85725"/>
           </a:xfrm>
           <a:prstGeom prst="ellipse">
@@ -2929,13 +3003,13 @@
       </p:sp>
       <p:sp>
         <p:nvSpPr>
-          <p:cNvPr id="22" name="Text 20"/>
-          <p:cNvSpPr/>
-          <p:nvPr/>
-        </p:nvSpPr>
-        <p:spPr>
-          <a:xfrm>
-            <a:off x="5486065" y="4199037"/>
+          <p:cNvPr id="24" name="Text 21"/>
+          <p:cNvSpPr/>
+          <p:nvPr/>
+        </p:nvSpPr>
+        <p:spPr>
+          <a:xfrm>
+            <a:off x="5326596" y="4434855"/>
             <a:ext cx="1639319" cy="209550"/>
           </a:xfrm>
           <a:prstGeom prst="rect">
@@ -2973,14 +3047,14 @@
       </p:sp>
       <p:sp>
         <p:nvSpPr>
-          <p:cNvPr id="23" name="Shape 21"/>
-          <p:cNvSpPr/>
-          <p:nvPr/>
-        </p:nvSpPr>
-        <p:spPr>
-          <a:xfrm>
-            <a:off x="8719877" y="4977557"/>
-            <a:ext cx="1905074" cy="342900"/>
+          <p:cNvPr id="25" name="Shape 22"/>
+          <p:cNvSpPr/>
+          <p:nvPr/>
+        </p:nvSpPr>
+        <p:spPr>
+          <a:xfrm>
+            <a:off x="8665629" y="5664845"/>
+            <a:ext cx="1375842" cy="190500"/>
           </a:xfrm>
           <a:prstGeom prst="roundRect">
             <a:avLst>
@@ -2988,13 +3062,84 @@
             </a:avLst>
           </a:prstGeom>
           <a:solidFill>
-            <a:srgbClr val="FFFFFF"/>
+            <a:srgbClr val="FAF2E1"/>
           </a:solidFill>
           <a:ln w="9525">
             <a:solidFill>
-              <a:srgbClr val="CADFF1"/>
+              <a:srgbClr val="E4C89A"/>
             </a:solidFill>
             <a:prstDash val="solid"/>
+          </a:ln>
+        </p:spPr>
+      </p:sp>
+      <p:sp>
+        <p:nvSpPr>
+          <p:cNvPr id="26" name="Text 23"/>
+          <p:cNvSpPr/>
+          <p:nvPr/>
+        </p:nvSpPr>
+        <p:spPr>
+          <a:xfrm>
+            <a:off x="8760879" y="5712470"/>
+            <a:ext cx="1261542" cy="133350"/>
+          </a:xfrm>
+          <a:prstGeom prst="rect">
+            <a:avLst/>
+          </a:prstGeom>
+          <a:noFill/>
+          <a:ln/>
+        </p:spPr>
+        <p:txBody>
+          <a:bodyPr wrap="none" lIns="25400" tIns="25400" rIns="25400" bIns="25400" rtlCol="0" anchor="t">
+            <a:normAutofit/>
+          </a:bodyPr>
+          <a:lstStyle/>
+          <a:p>
+            <a:pPr algn="l" indent="0" marL="0">
+              <a:lnSpc>
+                <a:spcPct val="100000"/>
+              </a:lnSpc>
+              <a:buNone/>
+            </a:pPr>
+            <a:r>
+              <a:rPr lang="en-US" sz="750" b="1" spc="90" kern="0" dirty="0">
+                <a:solidFill>
+                  <a:srgbClr val="9A6A1E"/>
+                </a:solidFill>
+                <a:latin typeface="Libre Franklin" pitchFamily="34" charset="0"/>
+                <a:ea typeface="Libre Franklin" pitchFamily="34" charset="-122"/>
+                <a:cs typeface="Libre Franklin" pitchFamily="34" charset="-120"/>
+              </a:rPr>
+              <a:t>NOT YET AVAILABLE</a:t>
+            </a:r>
+            <a:endParaRPr lang="en-US" sz="750" dirty="0"/>
+          </a:p>
+        </p:txBody>
+      </p:sp>
+      <p:sp>
+        <p:nvSpPr>
+          <p:cNvPr id="27" name="Shape 24"/>
+          <p:cNvSpPr/>
+          <p:nvPr/>
+        </p:nvSpPr>
+        <p:spPr>
+          <a:xfrm>
+            <a:off x="8391488" y="5912495"/>
+            <a:ext cx="1924124" cy="342900"/>
+          </a:xfrm>
+          <a:prstGeom prst="roundRect">
+            <a:avLst>
+              <a:gd name="adj" fmla="val 50000"/>
+            </a:avLst>
+          </a:prstGeom>
+          <a:solidFill>
+            <a:srgbClr val="FCF6EA"/>
+          </a:solidFill>
+          <a:ln w="19050">
+            <a:solidFill>
+              <a:srgbClr val="C0872E"/>
+            </a:solidFill>
+            <a:prstDash val="dash"/>
           </a:ln>
           <a:effectLst>
             <a:outerShdw sx="100000" sy="100000" kx="0" ky="0" algn="bl" rotWithShape="0" blurRad="66675" dist="19050" dir="5400000">
@@ -3007,13 +3152,13 @@
       </p:sp>
       <p:sp>
         <p:nvSpPr>
-          <p:cNvPr id="24" name="Shape 22"/>
-          <p:cNvSpPr/>
-          <p:nvPr/>
-        </p:nvSpPr>
-        <p:spPr>
-          <a:xfrm>
-            <a:off x="8834177" y="5106144"/>
+          <p:cNvPr id="28" name="Shape 25"/>
+          <p:cNvSpPr/>
+          <p:nvPr/>
+        </p:nvSpPr>
+        <p:spPr>
+          <a:xfrm>
+            <a:off x="8515313" y="6041082"/>
             <a:ext cx="85725" cy="85725"/>
           </a:xfrm>
           <a:prstGeom prst="ellipse">
@@ -3027,13 +3172,13 @@
       </p:sp>
       <p:sp>
         <p:nvSpPr>
-          <p:cNvPr id="25" name="Text 23"/>
-          <p:cNvSpPr/>
-          <p:nvPr/>
-        </p:nvSpPr>
-        <p:spPr>
-          <a:xfrm>
-            <a:off x="9005627" y="5063282"/>
+          <p:cNvPr id="29" name="Text 26"/>
+          <p:cNvSpPr/>
+          <p:nvPr/>
+        </p:nvSpPr>
+        <p:spPr>
+          <a:xfrm>
+            <a:off x="8686763" y="5998220"/>
             <a:ext cx="1613617" cy="209550"/>
           </a:xfrm>
           <a:prstGeom prst="rect">
@@ -3071,18 +3216,329 @@
       </p:sp>
       <p:sp>
         <p:nvSpPr>
-          <p:cNvPr id="26" name="Shape 24"/>
-          <p:cNvSpPr/>
-          <p:nvPr/>
-        </p:nvSpPr>
-        <p:spPr>
-          <a:xfrm>
-            <a:off x="10431028" y="3753222"/>
-            <a:ext cx="1671712" cy="342900"/>
+          <p:cNvPr id="30" name="Shape 27"/>
+          <p:cNvSpPr/>
+          <p:nvPr/>
+        </p:nvSpPr>
+        <p:spPr>
+          <a:xfrm>
+            <a:off x="9622296" y="3608338"/>
+            <a:ext cx="1375842" cy="190500"/>
           </a:xfrm>
           <a:prstGeom prst="roundRect">
             <a:avLst>
               <a:gd name="adj" fmla="val 50000"/>
+            </a:avLst>
+          </a:prstGeom>
+          <a:solidFill>
+            <a:srgbClr val="FAF2E1"/>
+          </a:solidFill>
+          <a:ln w="9525">
+            <a:solidFill>
+              <a:srgbClr val="E4C89A"/>
+            </a:solidFill>
+            <a:prstDash val="solid"/>
+          </a:ln>
+        </p:spPr>
+      </p:sp>
+      <p:sp>
+        <p:nvSpPr>
+          <p:cNvPr id="31" name="Text 28"/>
+          <p:cNvSpPr/>
+          <p:nvPr/>
+        </p:nvSpPr>
+        <p:spPr>
+          <a:xfrm>
+            <a:off x="9717546" y="3655963"/>
+            <a:ext cx="1261542" cy="133350"/>
+          </a:xfrm>
+          <a:prstGeom prst="rect">
+            <a:avLst/>
+          </a:prstGeom>
+          <a:noFill/>
+          <a:ln/>
+        </p:spPr>
+        <p:txBody>
+          <a:bodyPr wrap="none" lIns="25400" tIns="25400" rIns="25400" bIns="25400" rtlCol="0" anchor="t">
+            <a:normAutofit/>
+          </a:bodyPr>
+          <a:lstStyle/>
+          <a:p>
+            <a:pPr algn="l" indent="0" marL="0">
+              <a:lnSpc>
+                <a:spcPct val="100000"/>
+              </a:lnSpc>
+              <a:buNone/>
+            </a:pPr>
+            <a:r>
+              <a:rPr lang="en-US" sz="750" b="1" spc="90" kern="0" dirty="0">
+                <a:solidFill>
+                  <a:srgbClr val="9A6A1E"/>
+                </a:solidFill>
+                <a:latin typeface="Libre Franklin" pitchFamily="34" charset="0"/>
+                <a:ea typeface="Libre Franklin" pitchFamily="34" charset="-122"/>
+                <a:cs typeface="Libre Franklin" pitchFamily="34" charset="-120"/>
+              </a:rPr>
+              <a:t>NOT YET AVAILABLE</a:t>
+            </a:r>
+            <a:endParaRPr lang="en-US" sz="750" dirty="0"/>
+          </a:p>
+        </p:txBody>
+      </p:sp>
+      <p:sp>
+        <p:nvSpPr>
+          <p:cNvPr id="32" name="Shape 29"/>
+          <p:cNvSpPr/>
+          <p:nvPr/>
+        </p:nvSpPr>
+        <p:spPr>
+          <a:xfrm>
+            <a:off x="9464836" y="3855988"/>
+            <a:ext cx="1690762" cy="342900"/>
+          </a:xfrm>
+          <a:prstGeom prst="roundRect">
+            <a:avLst>
+              <a:gd name="adj" fmla="val 50000"/>
+            </a:avLst>
+          </a:prstGeom>
+          <a:solidFill>
+            <a:srgbClr val="0C2C4A"/>
+          </a:solidFill>
+          <a:ln w="19050">
+            <a:solidFill>
+              <a:srgbClr val="C0872E"/>
+            </a:solidFill>
+            <a:prstDash val="dash"/>
+          </a:ln>
+          <a:effectLst>
+            <a:outerShdw sx="100000" sy="100000" kx="0" ky="0" algn="bl" rotWithShape="0" blurRad="171450" dist="66675" dir="5400000">
+              <a:srgbClr val="0C2C4A">
+                <a:alpha val="22000"/>
+              </a:srgbClr>
+            </a:outerShdw>
+          </a:effectLst>
+        </p:spPr>
+      </p:sp>
+      <p:sp>
+        <p:nvSpPr>
+          <p:cNvPr id="33" name="Shape 30"/>
+          <p:cNvSpPr/>
+          <p:nvPr/>
+        </p:nvSpPr>
+        <p:spPr>
+          <a:xfrm>
+            <a:off x="9588661" y="3984575"/>
+            <a:ext cx="85725" cy="85725"/>
+          </a:xfrm>
+          <a:prstGeom prst="ellipse">
+            <a:avLst/>
+          </a:prstGeom>
+          <a:solidFill>
+            <a:srgbClr val="3D93D6"/>
+          </a:solidFill>
+          <a:ln/>
+        </p:spPr>
+      </p:sp>
+      <p:sp>
+        <p:nvSpPr>
+          <p:cNvPr id="34" name="Text 31"/>
+          <p:cNvSpPr/>
+          <p:nvPr/>
+        </p:nvSpPr>
+        <p:spPr>
+          <a:xfrm>
+            <a:off x="9760111" y="3941713"/>
+            <a:ext cx="1356918" cy="209550"/>
+          </a:xfrm>
+          <a:prstGeom prst="rect">
+            <a:avLst/>
+          </a:prstGeom>
+          <a:noFill/>
+          <a:ln/>
+        </p:spPr>
+        <p:txBody>
+          <a:bodyPr wrap="none" lIns="25400" tIns="25400" rIns="25400" bIns="25400" rtlCol="0" anchor="t">
+            <a:normAutofit/>
+          </a:bodyPr>
+          <a:lstStyle/>
+          <a:p>
+            <a:pPr algn="l" indent="0" marL="0">
+              <a:lnSpc>
+                <a:spcPct val="100000"/>
+              </a:lnSpc>
+              <a:buNone/>
+            </a:pPr>
+            <a:r>
+              <a:rPr lang="en-US" sz="1350" b="1" dirty="0">
+                <a:solidFill>
+                  <a:srgbClr val="FFFFFF"/>
+                </a:solidFill>
+                <a:latin typeface="Libre Franklin" pitchFamily="34" charset="0"/>
+                <a:ea typeface="Libre Franklin" pitchFamily="34" charset="-122"/>
+                <a:cs typeface="Libre Franklin" pitchFamily="34" charset="-120"/>
+              </a:rPr>
+              <a:t>Claude Cowork</a:t>
+            </a:r>
+            <a:endParaRPr lang="en-US" sz="1350" dirty="0"/>
+          </a:p>
+        </p:txBody>
+      </p:sp>
+      <p:sp>
+        <p:nvSpPr>
+          <p:cNvPr id="35" name="Text 32"/>
+          <p:cNvSpPr/>
+          <p:nvPr/>
+        </p:nvSpPr>
+        <p:spPr>
+          <a:xfrm>
+            <a:off x="13849983" y="3112294"/>
+            <a:ext cx="1333016" cy="133350"/>
+          </a:xfrm>
+          <a:prstGeom prst="rect">
+            <a:avLst/>
+          </a:prstGeom>
+          <a:noFill/>
+          <a:ln/>
+        </p:spPr>
+        <p:txBody>
+          <a:bodyPr wrap="none" lIns="25400" tIns="25400" rIns="25400" bIns="25400" rtlCol="0" anchor="t">
+            <a:normAutofit/>
+          </a:bodyPr>
+          <a:lstStyle/>
+          <a:p>
+            <a:pPr algn="l" indent="0" marL="0">
+              <a:lnSpc>
+                <a:spcPct val="100000"/>
+              </a:lnSpc>
+              <a:buNone/>
+            </a:pPr>
+            <a:r>
+              <a:rPr lang="en-US" sz="750" b="1" spc="90" kern="0" dirty="0">
+                <a:solidFill>
+                  <a:srgbClr val="94A2AE"/>
+                </a:solidFill>
+                <a:latin typeface="Libre Franklin" pitchFamily="34" charset="0"/>
+                <a:ea typeface="Libre Franklin" pitchFamily="34" charset="-122"/>
+                <a:cs typeface="Libre Franklin" pitchFamily="34" charset="-120"/>
+              </a:rPr>
+              <a:t>CAPABILITY CEILING</a:t>
+            </a:r>
+            <a:endParaRPr lang="en-US" sz="750" dirty="0"/>
+          </a:p>
+        </p:txBody>
+      </p:sp>
+      <p:sp>
+        <p:nvSpPr>
+          <p:cNvPr id="36" name="Shape 33"/>
+          <p:cNvSpPr/>
+          <p:nvPr/>
+        </p:nvSpPr>
+        <p:spPr>
+          <a:xfrm>
+            <a:off x="13469503" y="3255169"/>
+            <a:ext cx="1972791" cy="342900"/>
+          </a:xfrm>
+          <a:prstGeom prst="roundRect">
+            <a:avLst>
+              <a:gd name="adj" fmla="val 50000"/>
+            </a:avLst>
+          </a:prstGeom>
+          <a:solidFill>
+            <a:srgbClr val="FFFFFF"/>
+          </a:solidFill>
+          <a:ln w="19050">
+            <a:solidFill>
+              <a:srgbClr val="0C2C4A"/>
+            </a:solidFill>
+            <a:prstDash val="dash"/>
+          </a:ln>
+          <a:effectLst>
+            <a:outerShdw sx="100000" sy="100000" kx="0" ky="0" algn="bl" rotWithShape="0" blurRad="66675" dist="19050" dir="5400000">
+              <a:srgbClr val="102840">
+                <a:alpha val="9000"/>
+              </a:srgbClr>
+            </a:outerShdw>
+          </a:effectLst>
+        </p:spPr>
+      </p:sp>
+      <p:sp>
+        <p:nvSpPr>
+          <p:cNvPr id="37" name="Shape 34"/>
+          <p:cNvSpPr/>
+          <p:nvPr/>
+        </p:nvSpPr>
+        <p:spPr>
+          <a:xfrm>
+            <a:off x="13593328" y="3383756"/>
+            <a:ext cx="85725" cy="85725"/>
+          </a:xfrm>
+          <a:prstGeom prst="ellipse">
+            <a:avLst/>
+          </a:prstGeom>
+          <a:solidFill>
+            <a:srgbClr val="0C2C4A"/>
+          </a:solidFill>
+          <a:ln/>
+        </p:spPr>
+      </p:sp>
+      <p:sp>
+        <p:nvSpPr>
+          <p:cNvPr id="38" name="Text 35"/>
+          <p:cNvSpPr/>
+          <p:nvPr/>
+        </p:nvSpPr>
+        <p:spPr>
+          <a:xfrm>
+            <a:off x="13764778" y="3340894"/>
+            <a:ext cx="1667150" cy="209550"/>
+          </a:xfrm>
+          <a:prstGeom prst="rect">
+            <a:avLst/>
+          </a:prstGeom>
+          <a:noFill/>
+          <a:ln/>
+        </p:spPr>
+        <p:txBody>
+          <a:bodyPr wrap="none" lIns="25400" tIns="25400" rIns="25400" bIns="25400" rtlCol="0" anchor="t">
+            <a:normAutofit/>
+          </a:bodyPr>
+          <a:lstStyle/>
+          <a:p>
+            <a:pPr algn="l" indent="0" marL="0">
+              <a:lnSpc>
+                <a:spcPct val="100000"/>
+              </a:lnSpc>
+              <a:buNone/>
+            </a:pPr>
+            <a:r>
+              <a:rPr lang="en-US" sz="1350" b="1" dirty="0">
+                <a:solidFill>
+                  <a:srgbClr val="0C2C4A"/>
+                </a:solidFill>
+                <a:latin typeface="Libre Franklin" pitchFamily="34" charset="0"/>
+                <a:ea typeface="Libre Franklin" pitchFamily="34" charset="-122"/>
+                <a:cs typeface="Libre Franklin" pitchFamily="34" charset="-120"/>
+              </a:rPr>
+              <a:t>Claude Code — full</a:t>
+            </a:r>
+            <a:endParaRPr lang="en-US" sz="1350" dirty="0"/>
+          </a:p>
+        </p:txBody>
+      </p:sp>
+      <p:sp>
+        <p:nvSpPr>
+          <p:cNvPr id="39" name="Shape 36"/>
+          <p:cNvSpPr/>
+          <p:nvPr/>
+        </p:nvSpPr>
+        <p:spPr>
+          <a:xfrm>
+            <a:off x="10902516" y="5057403"/>
+            <a:ext cx="2323281" cy="571500"/>
+          </a:xfrm>
+          <a:prstGeom prst="roundRect">
+            <a:avLst>
+              <a:gd name="adj" fmla="val 18333"/>
             </a:avLst>
           </a:prstGeom>
           <a:solidFill>
@@ -3095,9 +3551,9 @@
             <a:prstDash val="solid"/>
           </a:ln>
           <a:effectLst>
-            <a:outerShdw sx="100000" sy="100000" kx="0" ky="0" algn="bl" rotWithShape="0" blurRad="171450" dist="66675" dir="5400000">
+            <a:outerShdw sx="100000" sy="100000" kx="0" ky="0" algn="bl" rotWithShape="0" blurRad="209550" dist="85725" dir="5400000">
               <a:srgbClr val="0C2C4A">
-                <a:alpha val="22000"/>
+                <a:alpha val="28000"/>
               </a:srgbClr>
             </a:outerShdw>
           </a:effectLst>
@@ -3105,13 +3561,13 @@
       </p:sp>
       <p:sp>
         <p:nvSpPr>
-          <p:cNvPr id="27" name="Shape 25"/>
-          <p:cNvSpPr/>
-          <p:nvPr/>
-        </p:nvSpPr>
-        <p:spPr>
-          <a:xfrm>
-            <a:off x="10545328" y="3881810"/>
+          <p:cNvPr id="40" name="Shape 37"/>
+          <p:cNvSpPr/>
+          <p:nvPr/>
+        </p:nvSpPr>
+        <p:spPr>
+          <a:xfrm>
+            <a:off x="11073966" y="5219328"/>
             <a:ext cx="85725" cy="85725"/>
           </a:xfrm>
           <a:prstGeom prst="ellipse">
@@ -3125,14 +3581,14 @@
       </p:sp>
       <p:sp>
         <p:nvSpPr>
-          <p:cNvPr id="28" name="Text 26"/>
-          <p:cNvSpPr/>
-          <p:nvPr/>
-        </p:nvSpPr>
-        <p:spPr>
-          <a:xfrm>
-            <a:off x="10716778" y="3838947"/>
-            <a:ext cx="1356918" cy="209550"/>
+          <p:cNvPr id="41" name="Text 38"/>
+          <p:cNvSpPr/>
+          <p:nvPr/>
+        </p:nvSpPr>
+        <p:spPr>
+          <a:xfrm>
+            <a:off x="11245416" y="5171703"/>
+            <a:ext cx="1174254" cy="219075"/>
           </a:xfrm>
           <a:prstGeom prst="rect">
             <a:avLst/>
@@ -3153,7 +3609,7 @@
               <a:buNone/>
             </a:pPr>
             <a:r>
-              <a:rPr lang="en-US" sz="1350" b="1" dirty="0">
+              <a:rPr lang="en-US" sz="1425" b="1" dirty="0">
                 <a:solidFill>
                   <a:srgbClr val="FFFFFF"/>
                 </a:solidFill>
@@ -3161,76 +3617,22 @@
                 <a:ea typeface="Libre Franklin" pitchFamily="34" charset="-122"/>
                 <a:cs typeface="Libre Franklin" pitchFamily="34" charset="-120"/>
               </a:rPr>
-              <a:t>Claude Cowork</a:t>
-            </a:r>
-            <a:endParaRPr lang="en-US" sz="1350" dirty="0"/>
-          </a:p>
-        </p:txBody>
-      </p:sp>
-      <p:sp>
-        <p:nvSpPr>
-          <p:cNvPr id="29" name="Shape 27"/>
-          <p:cNvSpPr/>
-          <p:nvPr/>
-        </p:nvSpPr>
-        <p:spPr>
-          <a:xfrm>
-            <a:off x="14198464" y="2744986"/>
-            <a:ext cx="1471538" cy="342900"/>
-          </a:xfrm>
-          <a:prstGeom prst="roundRect">
-            <a:avLst>
-              <a:gd name="adj" fmla="val 50000"/>
-            </a:avLst>
-          </a:prstGeom>
-          <a:solidFill>
-            <a:srgbClr val="0C2C4A"/>
-          </a:solidFill>
-          <a:ln w="9525">
-            <a:solidFill>
-              <a:srgbClr val="0C2C4A"/>
-            </a:solidFill>
-            <a:prstDash val="solid"/>
-          </a:ln>
-          <a:effectLst>
-            <a:outerShdw sx="100000" sy="100000" kx="0" ky="0" algn="bl" rotWithShape="0" blurRad="171450" dist="66675" dir="5400000">
-              <a:srgbClr val="0C2C4A">
-                <a:alpha val="22000"/>
-              </a:srgbClr>
-            </a:outerShdw>
-          </a:effectLst>
-        </p:spPr>
-      </p:sp>
-      <p:sp>
-        <p:nvSpPr>
-          <p:cNvPr id="30" name="Shape 28"/>
-          <p:cNvSpPr/>
-          <p:nvPr/>
-        </p:nvSpPr>
-        <p:spPr>
-          <a:xfrm>
-            <a:off x="14312764" y="2873573"/>
-            <a:ext cx="85725" cy="85725"/>
-          </a:xfrm>
-          <a:prstGeom prst="ellipse">
-            <a:avLst/>
-          </a:prstGeom>
-          <a:solidFill>
-            <a:srgbClr val="3D93D6"/>
-          </a:solidFill>
-          <a:ln/>
-        </p:spPr>
-      </p:sp>
-      <p:sp>
-        <p:nvSpPr>
-          <p:cNvPr id="31" name="Text 29"/>
-          <p:cNvSpPr/>
-          <p:nvPr/>
-        </p:nvSpPr>
-        <p:spPr>
-          <a:xfrm>
-            <a:off x="14484214" y="2830711"/>
-            <a:ext cx="1109588" cy="209550"/>
+              <a:t>Claude Code</a:t>
+            </a:r>
+            <a:endParaRPr lang="en-US" sz="1425" dirty="0"/>
+          </a:p>
+        </p:txBody>
+      </p:sp>
+      <p:sp>
+        <p:nvSpPr>
+          <p:cNvPr id="42" name="Text 39"/>
+          <p:cNvSpPr/>
+          <p:nvPr/>
+        </p:nvSpPr>
+        <p:spPr>
+          <a:xfrm>
+            <a:off x="11245416" y="5390778"/>
+            <a:ext cx="2006970" cy="152400"/>
           </a:xfrm>
           <a:prstGeom prst="rect">
             <a:avLst/>
@@ -3251,23 +3653,23 @@
               <a:buNone/>
             </a:pPr>
             <a:r>
-              <a:rPr lang="en-US" sz="1350" b="1" dirty="0">
-                <a:solidFill>
-                  <a:srgbClr val="FFFFFF"/>
-                </a:solidFill>
-                <a:latin typeface="Libre Franklin" pitchFamily="34" charset="0"/>
-                <a:ea typeface="Libre Franklin" pitchFamily="34" charset="-122"/>
-                <a:cs typeface="Libre Franklin" pitchFamily="34" charset="-120"/>
-              </a:rPr>
-              <a:t>Claude Code</a:t>
-            </a:r>
-            <a:endParaRPr lang="en-US" sz="1350" dirty="0"/>
-          </a:p>
-        </p:txBody>
-      </p:sp>
-      <p:sp>
-        <p:nvSpPr>
-          <p:cNvPr id="32" name="Text 30"/>
+              <a:rPr lang="en-US" sz="900" b="1" spc="54" kern="0" dirty="0">
+                <a:solidFill>
+                  <a:srgbClr val="3D93D6"/>
+                </a:solidFill>
+                <a:latin typeface="Libre Franklin" pitchFamily="34" charset="0"/>
+                <a:ea typeface="Libre Franklin" pitchFamily="34" charset="-122"/>
+                <a:cs typeface="Libre Franklin" pitchFamily="34" charset="-120"/>
+              </a:rPr>
+              <a:t>IN USE · SANDBOX · OPUS 4.7</a:t>
+            </a:r>
+            <a:endParaRPr lang="en-US" sz="900" dirty="0"/>
+          </a:p>
+        </p:txBody>
+      </p:sp>
+      <p:sp>
+        <p:nvSpPr>
+          <p:cNvPr id="43" name="Text 40"/>
           <p:cNvSpPr/>
           <p:nvPr/>
         </p:nvSpPr>
@@ -3311,7 +3713,7 @@
       </p:sp>
       <p:sp>
         <p:nvSpPr>
-          <p:cNvPr id="33" name="Text 31"/>
+          <p:cNvPr id="44" name="Text 41"/>
           <p:cNvSpPr/>
           <p:nvPr/>
         </p:nvSpPr>
@@ -3355,7 +3757,7 @@
       </p:sp>
       <p:sp>
         <p:nvSpPr>
-          <p:cNvPr id="34" name="Text 32"/>
+          <p:cNvPr id="45" name="Text 42"/>
           <p:cNvSpPr/>
           <p:nvPr/>
         </p:nvSpPr>
@@ -3399,7 +3801,7 @@
       </p:sp>
       <p:sp>
         <p:nvSpPr>
-          <p:cNvPr id="35" name="Shape 33"/>
+          <p:cNvPr id="46" name="Shape 43"/>
           <p:cNvSpPr/>
           <p:nvPr/>
         </p:nvSpPr>
@@ -3419,7 +3821,7 @@
       </p:sp>
       <p:sp>
         <p:nvSpPr>
-          <p:cNvPr id="36" name="Shape 34"/>
+          <p:cNvPr id="47" name="Shape 44"/>
           <p:cNvSpPr/>
           <p:nvPr/>
         </p:nvSpPr>
@@ -3444,7 +3846,7 @@
       </p:sp>
       <p:sp>
         <p:nvSpPr>
-          <p:cNvPr id="37" name="Text 35"/>
+          <p:cNvPr id="48" name="Text 45"/>
           <p:cNvSpPr/>
           <p:nvPr/>
         </p:nvSpPr>
@@ -3488,13 +3890,13 @@
       </p:sp>
       <p:sp>
         <p:nvSpPr>
-          <p:cNvPr id="38" name="Shape 36"/>
-          <p:cNvSpPr/>
-          <p:nvPr/>
-        </p:nvSpPr>
-        <p:spPr>
-          <a:xfrm>
-            <a:off x="2784053" y="9782175"/>
+          <p:cNvPr id="49" name="Shape 46"/>
+          <p:cNvSpPr/>
+          <p:nvPr/>
+        </p:nvSpPr>
+        <p:spPr>
+          <a:xfrm>
+            <a:off x="2745953" y="9782175"/>
             <a:ext cx="104775" cy="104775"/>
           </a:xfrm>
           <a:prstGeom prst="ellipse">
@@ -3508,13 +3910,13 @@
       </p:sp>
       <p:sp>
         <p:nvSpPr>
-          <p:cNvPr id="39" name="Text 37"/>
-          <p:cNvSpPr/>
-          <p:nvPr/>
-        </p:nvSpPr>
-        <p:spPr>
-          <a:xfrm>
-            <a:off x="2974553" y="9748838"/>
+          <p:cNvPr id="50" name="Text 47"/>
+          <p:cNvSpPr/>
+          <p:nvPr/>
+        </p:nvSpPr>
+        <p:spPr>
+          <a:xfrm>
+            <a:off x="2936453" y="9748838"/>
             <a:ext cx="579165" cy="209550"/>
           </a:xfrm>
           <a:prstGeom prst="rect">
@@ -3552,7 +3954,73 @@
       </p:sp>
       <p:sp>
         <p:nvSpPr>
-          <p:cNvPr id="40" name="Text 38"/>
+          <p:cNvPr id="51" name="Shape 48"/>
+          <p:cNvSpPr/>
+          <p:nvPr/>
+        </p:nvSpPr>
+        <p:spPr>
+          <a:xfrm>
+            <a:off x="3648968" y="9767888"/>
+            <a:ext cx="133350" cy="133350"/>
+          </a:xfrm>
+          <a:prstGeom prst="ellipse">
+            <a:avLst/>
+          </a:prstGeom>
+          <a:ln w="14288">
+            <a:solidFill>
+              <a:srgbClr val="C0872E"/>
+            </a:solidFill>
+            <a:prstDash val="dash"/>
+          </a:ln>
+        </p:spPr>
+      </p:sp>
+      <p:sp>
+        <p:nvSpPr>
+          <p:cNvPr id="52" name="Text 49"/>
+          <p:cNvSpPr/>
+          <p:nvPr/>
+        </p:nvSpPr>
+        <p:spPr>
+          <a:xfrm>
+            <a:off x="3868043" y="9748838"/>
+            <a:ext cx="2008436" cy="209550"/>
+          </a:xfrm>
+          <a:prstGeom prst="rect">
+            <a:avLst/>
+          </a:prstGeom>
+          <a:noFill/>
+          <a:ln/>
+        </p:spPr>
+        <p:txBody>
+          <a:bodyPr wrap="square" lIns="0" tIns="0" rIns="0" bIns="0" rtlCol="0" anchor="t">
+            <a:normAutofit/>
+          </a:bodyPr>
+          <a:lstStyle/>
+          <a:p>
+            <a:pPr algn="l" indent="0" marL="0">
+              <a:lnSpc>
+                <a:spcPct val="100000"/>
+              </a:lnSpc>
+              <a:buNone/>
+            </a:pPr>
+            <a:r>
+              <a:rPr lang="en-US" sz="1125" spc="45" kern="0" dirty="0">
+                <a:solidFill>
+                  <a:srgbClr val="566573"/>
+                </a:solidFill>
+                <a:latin typeface="Libre Franklin" pitchFamily="34" charset="0"/>
+                <a:ea typeface="Libre Franklin" pitchFamily="34" charset="-122"/>
+                <a:cs typeface="Libre Franklin" pitchFamily="34" charset="-120"/>
+              </a:rPr>
+              <a:t>Not yet in our environment</a:t>
+            </a:r>
+            <a:endParaRPr lang="en-US" sz="1125" dirty="0"/>
+          </a:p>
+        </p:txBody>
+      </p:sp>
+      <p:sp>
+        <p:nvSpPr>
+          <p:cNvPr id="53" name="Text 50"/>
           <p:cNvSpPr/>
           <p:nvPr/>
         </p:nvSpPr>
